--- a/public/lessons/year-6-maths/spring/week-12/add-mixed-numbers/teaching-powerpoint-v1.pptx
+++ b/public/lessons/year-6-maths/spring/week-12/add-mixed-numbers/teaching-powerpoint-v1.pptx
@@ -2,24 +2,24 @@
 <file path=ppt/presentation.xml><?xml version="1.0" encoding="utf-8"?>
 <p:presentation xmlns:p="http://schemas.openxmlformats.org/presentationml/2006/main">
   <p:sldMasterIdLst>
-    <p:sldMasterId xmlns:r="http://schemas.openxmlformats.org/officeDocument/2006/relationships" id="2147483648" r:id="R88d015f035784533"/>
+    <p:sldMasterId xmlns:r="http://schemas.openxmlformats.org/officeDocument/2006/relationships" id="2147483648" r:id="Rdde0fce970544ef8"/>
   </p:sldMasterIdLst>
   <p:notesMasterIdLst>
-    <p:notesMasterId xmlns:r="http://schemas.openxmlformats.org/officeDocument/2006/relationships" r:id="R097dd23015cb4a10"/>
+    <p:notesMasterId xmlns:r="http://schemas.openxmlformats.org/officeDocument/2006/relationships" r:id="Rbd9577556e6c4d02"/>
   </p:notesMasterIdLst>
   <p:sldIdLst>
-    <p:sldId xmlns:r="http://schemas.openxmlformats.org/officeDocument/2006/relationships" id="256" r:id="Re77e570f98024840"/>
-    <p:sldId xmlns:r="http://schemas.openxmlformats.org/officeDocument/2006/relationships" id="257" r:id="Rf7a6faadd05c4e9c"/>
-    <p:sldId xmlns:r="http://schemas.openxmlformats.org/officeDocument/2006/relationships" id="258" r:id="R81726ac5290d4494"/>
-    <p:sldId xmlns:r="http://schemas.openxmlformats.org/officeDocument/2006/relationships" id="259" r:id="R826f97d2bf964a8d"/>
-    <p:sldId xmlns:r="http://schemas.openxmlformats.org/officeDocument/2006/relationships" id="260" r:id="R2730bf4ee07743fa"/>
-    <p:sldId xmlns:r="http://schemas.openxmlformats.org/officeDocument/2006/relationships" id="261" r:id="R91392310cd8b4479"/>
-    <p:sldId xmlns:r="http://schemas.openxmlformats.org/officeDocument/2006/relationships" id="262" r:id="R3f4099d85d374c4d"/>
-    <p:sldId xmlns:r="http://schemas.openxmlformats.org/officeDocument/2006/relationships" id="263" r:id="Rd13b177b19c04c63"/>
-    <p:sldId xmlns:r="http://schemas.openxmlformats.org/officeDocument/2006/relationships" id="264" r:id="R28198879cd624c05"/>
-    <p:sldId xmlns:r="http://schemas.openxmlformats.org/officeDocument/2006/relationships" id="265" r:id="R25679425833f4d2a"/>
-    <p:sldId xmlns:r="http://schemas.openxmlformats.org/officeDocument/2006/relationships" id="266" r:id="R99551d0011b24890"/>
-    <p:sldId xmlns:r="http://schemas.openxmlformats.org/officeDocument/2006/relationships" id="267" r:id="R9a9c815e93de4cb4"/>
+    <p:sldId xmlns:r="http://schemas.openxmlformats.org/officeDocument/2006/relationships" id="256" r:id="R15d2de912eb84ffe"/>
+    <p:sldId xmlns:r="http://schemas.openxmlformats.org/officeDocument/2006/relationships" id="257" r:id="R35c9f17fd7e848b0"/>
+    <p:sldId xmlns:r="http://schemas.openxmlformats.org/officeDocument/2006/relationships" id="258" r:id="R058c2c8c1a3849c1"/>
+    <p:sldId xmlns:r="http://schemas.openxmlformats.org/officeDocument/2006/relationships" id="259" r:id="R556d43516f524c7e"/>
+    <p:sldId xmlns:r="http://schemas.openxmlformats.org/officeDocument/2006/relationships" id="260" r:id="Rd71a95b18d9d4060"/>
+    <p:sldId xmlns:r="http://schemas.openxmlformats.org/officeDocument/2006/relationships" id="261" r:id="R0dca2dc30c0a43c5"/>
+    <p:sldId xmlns:r="http://schemas.openxmlformats.org/officeDocument/2006/relationships" id="262" r:id="R7c51d0e6946d4d71"/>
+    <p:sldId xmlns:r="http://schemas.openxmlformats.org/officeDocument/2006/relationships" id="263" r:id="R1eb0fc265548463d"/>
+    <p:sldId xmlns:r="http://schemas.openxmlformats.org/officeDocument/2006/relationships" id="264" r:id="R18e24062f6cc4f43"/>
+    <p:sldId xmlns:r="http://schemas.openxmlformats.org/officeDocument/2006/relationships" id="265" r:id="R9105b8d8b3f3439c"/>
+    <p:sldId xmlns:r="http://schemas.openxmlformats.org/officeDocument/2006/relationships" id="266" r:id="Rc60fa85e40984ca7"/>
+    <p:sldId xmlns:r="http://schemas.openxmlformats.org/officeDocument/2006/relationships" id="267" r:id="R39f4884fc03c41ff"/>
   </p:sldIdLst>
   <p:sldSz cx="12192000" cy="6858000"/>
   <p:notesSz cx="6858000" cy="9144000"/>
@@ -873,7 +873,7 @@
           <a:lstStyle xmlns:a="http://schemas.openxmlformats.org/drawingml/2006/main"/>
           <a:p xmlns:a="http://schemas.openxmlformats.org/drawingml/2006/main">
             <a:r>
-              <a:t>I do. Reveal the question, setup and each calculation stage one click at a time. Pupils watch before copying. Model answer: 4 1/6.</a:t>
+              <a:t>I do. Reveal the question, then reveal each mathematical change one click at a time. Point to the numbers and operation that changed before moving to the next line. Final answer: 4 1/6.</a:t>
             </a:r>
           </a:p>
         </p:txBody>
@@ -1291,7 +1291,7 @@
   </p:cSld>
   <p:clrMap bg1="lt1" tx1="dk1" bg2="lt2" tx2="dk2" accent1="accent1" accent2="accent2" accent3="accent3" accent4="accent4" accent5="accent5" accent6="accent6" hlink="hlink" folHlink="folHlink"/>
   <p:sldLayoutIdLst>
-    <p:sldLayoutId xmlns:r="http://schemas.openxmlformats.org/officeDocument/2006/relationships" id="2147483649" r:id="R4d94a4c31aa34434"/>
+    <p:sldLayoutId xmlns:r="http://schemas.openxmlformats.org/officeDocument/2006/relationships" id="2147483649" r:id="Rc5ad4e6f960f4450"/>
   </p:sldLayoutIdLst>
   <p:txStyles>
     <p:titleStyle>
@@ -1842,7 +1842,7 @@
           <p:cNvPr id="12" name="">
             <a:extLst xmlns:a="http://schemas.openxmlformats.org/drawingml/2006/main">
               <a:ext uri="{FF2B5EF4-FFF2-40B4-BE49-F238E27FC236}">
-                <a16:creationId xmlns:a16="http://schemas.microsoft.com/office/drawing/2014/main" id="{F5F502DF-4D09-4638-9C5F-8EC0207B7B31}"/>
+                <a16:creationId xmlns:a16="http://schemas.microsoft.com/office/drawing/2014/main" id="{70B18FA4-1613-45C2-9433-57EC25349816}"/>
               </a:ext>
             </a:extLst>
           </p:cNvPr>
@@ -1874,7 +1874,7 @@
           <p:cNvPr id="2" name="">
             <a:extLst xmlns:a="http://schemas.openxmlformats.org/drawingml/2006/main">
               <a:ext uri="{FF2B5EF4-FFF2-40B4-BE49-F238E27FC236}">
-                <a16:creationId xmlns:a16="http://schemas.microsoft.com/office/drawing/2014/main" id="{E94D0FFD-823B-4BA1-A275-8C4AF1F6D368}"/>
+                <a16:creationId xmlns:a16="http://schemas.microsoft.com/office/drawing/2014/main" id="{CC814F1C-026B-456E-B1A3-38A961F037B6}"/>
               </a:ext>
             </a:extLst>
           </p:cNvPr>
@@ -1931,7 +1931,7 @@
           <p:cNvPr id="3" name="">
             <a:extLst xmlns:a="http://schemas.openxmlformats.org/drawingml/2006/main">
               <a:ext uri="{FF2B5EF4-FFF2-40B4-BE49-F238E27FC236}">
-                <a16:creationId xmlns:a16="http://schemas.microsoft.com/office/drawing/2014/main" id="{1B75D86F-FBDA-47CD-8E5E-DB96BB80DE91}"/>
+                <a16:creationId xmlns:a16="http://schemas.microsoft.com/office/drawing/2014/main" id="{06E969BC-11CF-4CA5-9ED7-2D0ED1DD8E94}"/>
               </a:ext>
             </a:extLst>
           </p:cNvPr>
@@ -1965,7 +1965,7 @@
           <p:cNvPr id="4" name="">
             <a:extLst xmlns:a="http://schemas.openxmlformats.org/drawingml/2006/main">
               <a:ext uri="{FF2B5EF4-FFF2-40B4-BE49-F238E27FC236}">
-                <a16:creationId xmlns:a16="http://schemas.microsoft.com/office/drawing/2014/main" id="{FEEDC8B9-08E5-4B59-BA8B-D8C4A497AEA2}"/>
+                <a16:creationId xmlns:a16="http://schemas.microsoft.com/office/drawing/2014/main" id="{D5675A52-CF3B-4B0B-8731-7CBFA87CA4D2}"/>
               </a:ext>
             </a:extLst>
           </p:cNvPr>
@@ -2022,7 +2022,7 @@
           <p:cNvPr id="5" name="">
             <a:extLst xmlns:a="http://schemas.openxmlformats.org/drawingml/2006/main">
               <a:ext uri="{FF2B5EF4-FFF2-40B4-BE49-F238E27FC236}">
-                <a16:creationId xmlns:a16="http://schemas.microsoft.com/office/drawing/2014/main" id="{85CA11C7-2A21-4A96-9D14-93DFDC9CC657}"/>
+                <a16:creationId xmlns:a16="http://schemas.microsoft.com/office/drawing/2014/main" id="{41479EAF-5225-44D8-B936-8A12B3F1617D}"/>
               </a:ext>
             </a:extLst>
           </p:cNvPr>
@@ -2079,7 +2079,7 @@
           <p:cNvPr id="6" name="">
             <a:extLst xmlns:a="http://schemas.openxmlformats.org/drawingml/2006/main">
               <a:ext uri="{FF2B5EF4-FFF2-40B4-BE49-F238E27FC236}">
-                <a16:creationId xmlns:a16="http://schemas.microsoft.com/office/drawing/2014/main" id="{9CA9EB62-BBFF-496F-BA75-899EEFE21F28}"/>
+                <a16:creationId xmlns:a16="http://schemas.microsoft.com/office/drawing/2014/main" id="{19AE2B07-EC44-49E6-A878-6089FABEFCEF}"/>
               </a:ext>
             </a:extLst>
           </p:cNvPr>
@@ -2113,7 +2113,7 @@
           <p:cNvPr id="7" name="">
             <a:extLst xmlns:a="http://schemas.openxmlformats.org/drawingml/2006/main">
               <a:ext uri="{FF2B5EF4-FFF2-40B4-BE49-F238E27FC236}">
-                <a16:creationId xmlns:a16="http://schemas.microsoft.com/office/drawing/2014/main" id="{0F8028FF-D02A-45A5-A72C-29820AE77453}"/>
+                <a16:creationId xmlns:a16="http://schemas.microsoft.com/office/drawing/2014/main" id="{FA031475-8D6F-4460-9D6B-341D7C682C22}"/>
               </a:ext>
             </a:extLst>
           </p:cNvPr>
@@ -2170,7 +2170,7 @@
           <p:cNvPr id="8" name="">
             <a:extLst xmlns:a="http://schemas.openxmlformats.org/drawingml/2006/main">
               <a:ext uri="{FF2B5EF4-FFF2-40B4-BE49-F238E27FC236}">
-                <a16:creationId xmlns:a16="http://schemas.microsoft.com/office/drawing/2014/main" id="{0E10C43F-10D7-4640-A7F3-F15383B89602}"/>
+                <a16:creationId xmlns:a16="http://schemas.microsoft.com/office/drawing/2014/main" id="{58506D24-8BE1-4B7C-A5E4-F441085361A1}"/>
               </a:ext>
             </a:extLst>
           </p:cNvPr>
@@ -2227,7 +2227,7 @@
           <p:cNvPr id="9" name="">
             <a:extLst xmlns:a="http://schemas.openxmlformats.org/drawingml/2006/main">
               <a:ext uri="{FF2B5EF4-FFF2-40B4-BE49-F238E27FC236}">
-                <a16:creationId xmlns:a16="http://schemas.microsoft.com/office/drawing/2014/main" id="{255E13D9-5FE4-4B86-AAF8-39F27464C5F8}"/>
+                <a16:creationId xmlns:a16="http://schemas.microsoft.com/office/drawing/2014/main" id="{CA1C10C6-D28E-4D17-9A5E-3432B7BC2796}"/>
               </a:ext>
             </a:extLst>
           </p:cNvPr>
@@ -2284,7 +2284,7 @@
           <p:cNvPr id="10" name="">
             <a:extLst xmlns:a="http://schemas.openxmlformats.org/drawingml/2006/main">
               <a:ext uri="{FF2B5EF4-FFF2-40B4-BE49-F238E27FC236}">
-                <a16:creationId xmlns:a16="http://schemas.microsoft.com/office/drawing/2014/main" id="{3DFBFC5F-D70F-4AB2-8090-DBB5C98F85F0}"/>
+                <a16:creationId xmlns:a16="http://schemas.microsoft.com/office/drawing/2014/main" id="{668B58E7-D679-48E5-8236-F63572968A34}"/>
               </a:ext>
             </a:extLst>
           </p:cNvPr>
@@ -2341,7 +2341,7 @@
           <p:cNvPr id="11" name="">
             <a:extLst xmlns:a="http://schemas.openxmlformats.org/drawingml/2006/main">
               <a:ext uri="{FF2B5EF4-FFF2-40B4-BE49-F238E27FC236}">
-                <a16:creationId xmlns:a16="http://schemas.microsoft.com/office/drawing/2014/main" id="{9422A3C3-B832-408C-9C74-D813B5932207}"/>
+                <a16:creationId xmlns:a16="http://schemas.microsoft.com/office/drawing/2014/main" id="{5B84B836-8521-4A60-9DFE-763E64924D96}"/>
               </a:ext>
             </a:extLst>
           </p:cNvPr>
@@ -2396,7 +2396,7 @@
     </p:spTree>
     <p:extLst>
       <p:ext uri="{BB962C8B-B14F-4D97-AF65-F5344CB8AC3E}">
-        <p14:creationId xmlns:p14="http://schemas.microsoft.com/office/powerpoint/2010/main" val="659883007"/>
+        <p14:creationId xmlns:p14="http://schemas.microsoft.com/office/powerpoint/2010/main" val="1425875293"/>
       </p:ext>
     </p:extLst>
   </p:cSld>
@@ -2427,7 +2427,7 @@
           <p:cNvPr id="14" name="">
             <a:extLst xmlns:a="http://schemas.openxmlformats.org/drawingml/2006/main">
               <a:ext uri="{FF2B5EF4-FFF2-40B4-BE49-F238E27FC236}">
-                <a16:creationId xmlns:a16="http://schemas.microsoft.com/office/drawing/2014/main" id="{E24A775D-D9EA-4446-965C-AD87019E6589}"/>
+                <a16:creationId xmlns:a16="http://schemas.microsoft.com/office/drawing/2014/main" id="{69D39D5F-34AD-4A1B-838B-DA853CC1B7B0}"/>
               </a:ext>
             </a:extLst>
           </p:cNvPr>
@@ -2459,7 +2459,7 @@
           <p:cNvPr id="2" name="">
             <a:extLst xmlns:a="http://schemas.openxmlformats.org/drawingml/2006/main">
               <a:ext uri="{FF2B5EF4-FFF2-40B4-BE49-F238E27FC236}">
-                <a16:creationId xmlns:a16="http://schemas.microsoft.com/office/drawing/2014/main" id="{F17336B0-FF19-4393-85AB-8EA227021F43}"/>
+                <a16:creationId xmlns:a16="http://schemas.microsoft.com/office/drawing/2014/main" id="{5E2E3B50-1706-4A36-B3C5-10C30B70462D}"/>
               </a:ext>
             </a:extLst>
           </p:cNvPr>
@@ -2516,7 +2516,7 @@
           <p:cNvPr id="3" name="">
             <a:extLst xmlns:a="http://schemas.openxmlformats.org/drawingml/2006/main">
               <a:ext uri="{FF2B5EF4-FFF2-40B4-BE49-F238E27FC236}">
-                <a16:creationId xmlns:a16="http://schemas.microsoft.com/office/drawing/2014/main" id="{2E64427B-970B-413B-B5AB-AE5D350F84B7}"/>
+                <a16:creationId xmlns:a16="http://schemas.microsoft.com/office/drawing/2014/main" id="{1B20FD95-50CC-47E0-B0D5-015B711A97EC}"/>
               </a:ext>
             </a:extLst>
           </p:cNvPr>
@@ -2548,7 +2548,7 @@
           <p:cNvPr id="4" name="">
             <a:extLst xmlns:a="http://schemas.openxmlformats.org/drawingml/2006/main">
               <a:ext uri="{FF2B5EF4-FFF2-40B4-BE49-F238E27FC236}">
-                <a16:creationId xmlns:a16="http://schemas.microsoft.com/office/drawing/2014/main" id="{B0398BFC-DC25-465C-8D16-E8C0A65D5E3B}"/>
+                <a16:creationId xmlns:a16="http://schemas.microsoft.com/office/drawing/2014/main" id="{B0BDA1E9-CC4E-4B4C-8250-436670873332}"/>
               </a:ext>
             </a:extLst>
           </p:cNvPr>
@@ -2605,7 +2605,7 @@
           <p:cNvPr id="5" name="">
             <a:extLst xmlns:a="http://schemas.openxmlformats.org/drawingml/2006/main">
               <a:ext uri="{FF2B5EF4-FFF2-40B4-BE49-F238E27FC236}">
-                <a16:creationId xmlns:a16="http://schemas.microsoft.com/office/drawing/2014/main" id="{A729D2A5-E96B-4740-994E-C04226B58A18}"/>
+                <a16:creationId xmlns:a16="http://schemas.microsoft.com/office/drawing/2014/main" id="{F452D2CD-999E-4885-B004-FC408DD8BE2C}"/>
               </a:ext>
             </a:extLst>
           </p:cNvPr>
@@ -2662,7 +2662,7 @@
           <p:cNvPr id="6" name="">
             <a:extLst xmlns:a="http://schemas.openxmlformats.org/drawingml/2006/main">
               <a:ext uri="{FF2B5EF4-FFF2-40B4-BE49-F238E27FC236}">
-                <a16:creationId xmlns:a16="http://schemas.microsoft.com/office/drawing/2014/main" id="{9D384D97-8894-4092-BB05-8521A98A7845}"/>
+                <a16:creationId xmlns:a16="http://schemas.microsoft.com/office/drawing/2014/main" id="{3EE99782-97EA-41AA-A059-2B4976E612CE}"/>
               </a:ext>
             </a:extLst>
           </p:cNvPr>
@@ -2719,7 +2719,7 @@
           <p:cNvPr id="7" name="">
             <a:extLst xmlns:a="http://schemas.openxmlformats.org/drawingml/2006/main">
               <a:ext uri="{FF2B5EF4-FFF2-40B4-BE49-F238E27FC236}">
-                <a16:creationId xmlns:a16="http://schemas.microsoft.com/office/drawing/2014/main" id="{7F127718-B18F-47A2-A928-DD7030669902}"/>
+                <a16:creationId xmlns:a16="http://schemas.microsoft.com/office/drawing/2014/main" id="{A07AB3E8-D994-4B43-87C3-6ED0D399C1B4}"/>
               </a:ext>
             </a:extLst>
           </p:cNvPr>
@@ -2751,7 +2751,7 @@
           <p:cNvPr id="8" name="">
             <a:extLst xmlns:a="http://schemas.openxmlformats.org/drawingml/2006/main">
               <a:ext uri="{FF2B5EF4-FFF2-40B4-BE49-F238E27FC236}">
-                <a16:creationId xmlns:a16="http://schemas.microsoft.com/office/drawing/2014/main" id="{14DA33A6-1AFA-40CD-A20B-DB9C394153E5}"/>
+                <a16:creationId xmlns:a16="http://schemas.microsoft.com/office/drawing/2014/main" id="{B2E83C23-5B6C-4707-BA99-9D6376515EEF}"/>
               </a:ext>
             </a:extLst>
           </p:cNvPr>
@@ -2808,7 +2808,7 @@
           <p:cNvPr id="9" name="">
             <a:extLst xmlns:a="http://schemas.openxmlformats.org/drawingml/2006/main">
               <a:ext uri="{FF2B5EF4-FFF2-40B4-BE49-F238E27FC236}">
-                <a16:creationId xmlns:a16="http://schemas.microsoft.com/office/drawing/2014/main" id="{71182514-2DC0-4435-B4C3-F88C830A9B24}"/>
+                <a16:creationId xmlns:a16="http://schemas.microsoft.com/office/drawing/2014/main" id="{7914AB30-A44D-4EF8-AD4E-A3EB17ABE560}"/>
               </a:ext>
             </a:extLst>
           </p:cNvPr>
@@ -2865,7 +2865,7 @@
           <p:cNvPr id="10" name="">
             <a:extLst xmlns:a="http://schemas.openxmlformats.org/drawingml/2006/main">
               <a:ext uri="{FF2B5EF4-FFF2-40B4-BE49-F238E27FC236}">
-                <a16:creationId xmlns:a16="http://schemas.microsoft.com/office/drawing/2014/main" id="{E8C8C5F6-E5FC-4235-B24E-B968FF8C87A9}"/>
+                <a16:creationId xmlns:a16="http://schemas.microsoft.com/office/drawing/2014/main" id="{9F4C3B75-544F-4783-980B-ACE76DF1AA8F}"/>
               </a:ext>
             </a:extLst>
           </p:cNvPr>
@@ -2922,7 +2922,7 @@
           <p:cNvPr id="11" name="">
             <a:extLst xmlns:a="http://schemas.openxmlformats.org/drawingml/2006/main">
               <a:ext uri="{FF2B5EF4-FFF2-40B4-BE49-F238E27FC236}">
-                <a16:creationId xmlns:a16="http://schemas.microsoft.com/office/drawing/2014/main" id="{FE416F9B-93D2-428A-BB3D-BEF6F21C5C6B}"/>
+                <a16:creationId xmlns:a16="http://schemas.microsoft.com/office/drawing/2014/main" id="{E687F1B1-453F-4BDB-B642-12AA426B0E28}"/>
               </a:ext>
             </a:extLst>
           </p:cNvPr>
@@ -2979,7 +2979,7 @@
           <p:cNvPr id="12" name="">
             <a:extLst xmlns:a="http://schemas.openxmlformats.org/drawingml/2006/main">
               <a:ext uri="{FF2B5EF4-FFF2-40B4-BE49-F238E27FC236}">
-                <a16:creationId xmlns:a16="http://schemas.microsoft.com/office/drawing/2014/main" id="{EC587563-2D61-492F-83BC-E51D09727B48}"/>
+                <a16:creationId xmlns:a16="http://schemas.microsoft.com/office/drawing/2014/main" id="{9C91A5AF-54DE-40B1-94EF-73C6FFDB374F}"/>
               </a:ext>
             </a:extLst>
           </p:cNvPr>
@@ -3036,7 +3036,7 @@
           <p:cNvPr id="13" name="">
             <a:extLst xmlns:a="http://schemas.openxmlformats.org/drawingml/2006/main">
               <a:ext uri="{FF2B5EF4-FFF2-40B4-BE49-F238E27FC236}">
-                <a16:creationId xmlns:a16="http://schemas.microsoft.com/office/drawing/2014/main" id="{59929473-B620-4A1B-9B4C-FBED698E7E62}"/>
+                <a16:creationId xmlns:a16="http://schemas.microsoft.com/office/drawing/2014/main" id="{6E5F05A5-72F9-4672-BDC0-E94D28AB1D9C}"/>
               </a:ext>
             </a:extLst>
           </p:cNvPr>
@@ -3091,7 +3091,7 @@
     </p:spTree>
     <p:extLst>
       <p:ext uri="{BB962C8B-B14F-4D97-AF65-F5344CB8AC3E}">
-        <p14:creationId xmlns:p14="http://schemas.microsoft.com/office/powerpoint/2010/main" val="1163827423"/>
+        <p14:creationId xmlns:p14="http://schemas.microsoft.com/office/powerpoint/2010/main" val="696997617"/>
       </p:ext>
     </p:extLst>
   </p:cSld>
@@ -3292,7 +3292,7 @@
           <p:cNvPr id="19" name="">
             <a:extLst xmlns:a="http://schemas.openxmlformats.org/drawingml/2006/main">
               <a:ext uri="{FF2B5EF4-FFF2-40B4-BE49-F238E27FC236}">
-                <a16:creationId xmlns:a16="http://schemas.microsoft.com/office/drawing/2014/main" id="{8A2556BC-FA60-42FE-B595-FDCACF80F595}"/>
+                <a16:creationId xmlns:a16="http://schemas.microsoft.com/office/drawing/2014/main" id="{A5614A4D-685E-4D88-95FF-FE7D42324938}"/>
               </a:ext>
             </a:extLst>
           </p:cNvPr>
@@ -3324,7 +3324,7 @@
           <p:cNvPr id="2" name="">
             <a:extLst xmlns:a="http://schemas.openxmlformats.org/drawingml/2006/main">
               <a:ext uri="{FF2B5EF4-FFF2-40B4-BE49-F238E27FC236}">
-                <a16:creationId xmlns:a16="http://schemas.microsoft.com/office/drawing/2014/main" id="{FBE3C08F-2244-441C-A613-E396EC02B1C0}"/>
+                <a16:creationId xmlns:a16="http://schemas.microsoft.com/office/drawing/2014/main" id="{59465D65-0BD2-4E2C-927A-7B7A4FB6A3CC}"/>
               </a:ext>
             </a:extLst>
           </p:cNvPr>
@@ -3381,7 +3381,7 @@
           <p:cNvPr id="3" name="">
             <a:extLst xmlns:a="http://schemas.openxmlformats.org/drawingml/2006/main">
               <a:ext uri="{FF2B5EF4-FFF2-40B4-BE49-F238E27FC236}">
-                <a16:creationId xmlns:a16="http://schemas.microsoft.com/office/drawing/2014/main" id="{E072CEB4-209C-4854-AF83-846FD14AAAA4}"/>
+                <a16:creationId xmlns:a16="http://schemas.microsoft.com/office/drawing/2014/main" id="{2E16379E-5CCF-4E02-8413-BD15737F9811}"/>
               </a:ext>
             </a:extLst>
           </p:cNvPr>
@@ -3413,7 +3413,7 @@
           <p:cNvPr id="4" name="">
             <a:extLst xmlns:a="http://schemas.openxmlformats.org/drawingml/2006/main">
               <a:ext uri="{FF2B5EF4-FFF2-40B4-BE49-F238E27FC236}">
-                <a16:creationId xmlns:a16="http://schemas.microsoft.com/office/drawing/2014/main" id="{FE3306A8-536B-48B8-901B-F599370A802C}"/>
+                <a16:creationId xmlns:a16="http://schemas.microsoft.com/office/drawing/2014/main" id="{9928B50F-38B4-4C07-B1CB-23781ED639F9}"/>
               </a:ext>
             </a:extLst>
           </p:cNvPr>
@@ -3470,7 +3470,7 @@
           <p:cNvPr id="5" name="">
             <a:extLst xmlns:a="http://schemas.openxmlformats.org/drawingml/2006/main">
               <a:ext uri="{FF2B5EF4-FFF2-40B4-BE49-F238E27FC236}">
-                <a16:creationId xmlns:a16="http://schemas.microsoft.com/office/drawing/2014/main" id="{A01C87AE-42DD-4CDE-853D-BC6AE4A10C9B}"/>
+                <a16:creationId xmlns:a16="http://schemas.microsoft.com/office/drawing/2014/main" id="{719FEC79-0F3B-4C08-BD7B-D9B9C9D42455}"/>
               </a:ext>
             </a:extLst>
           </p:cNvPr>
@@ -3527,7 +3527,7 @@
           <p:cNvPr id="6" name="">
             <a:extLst xmlns:a="http://schemas.openxmlformats.org/drawingml/2006/main">
               <a:ext uri="{FF2B5EF4-FFF2-40B4-BE49-F238E27FC236}">
-                <a16:creationId xmlns:a16="http://schemas.microsoft.com/office/drawing/2014/main" id="{C09029A0-454F-490D-8E19-C2AAA7E420A7}"/>
+                <a16:creationId xmlns:a16="http://schemas.microsoft.com/office/drawing/2014/main" id="{61F05610-17E5-4FAA-94C7-718BC14E9739}"/>
               </a:ext>
             </a:extLst>
           </p:cNvPr>
@@ -3584,7 +3584,7 @@
           <p:cNvPr id="7" name="">
             <a:extLst xmlns:a="http://schemas.openxmlformats.org/drawingml/2006/main">
               <a:ext uri="{FF2B5EF4-FFF2-40B4-BE49-F238E27FC236}">
-                <a16:creationId xmlns:a16="http://schemas.microsoft.com/office/drawing/2014/main" id="{E7BD458C-9DB3-4B5B-8A08-D690E30C3FDB}"/>
+                <a16:creationId xmlns:a16="http://schemas.microsoft.com/office/drawing/2014/main" id="{67C75269-7436-4A9D-BDEA-DEFEF2D64949}"/>
               </a:ext>
             </a:extLst>
           </p:cNvPr>
@@ -3616,7 +3616,7 @@
           <p:cNvPr id="8" name="">
             <a:extLst xmlns:a="http://schemas.openxmlformats.org/drawingml/2006/main">
               <a:ext uri="{FF2B5EF4-FFF2-40B4-BE49-F238E27FC236}">
-                <a16:creationId xmlns:a16="http://schemas.microsoft.com/office/drawing/2014/main" id="{AF0B497D-1B7F-416B-BC46-B242BB974475}"/>
+                <a16:creationId xmlns:a16="http://schemas.microsoft.com/office/drawing/2014/main" id="{CAE5D2DE-9556-4369-ADF0-90BFA3686F16}"/>
               </a:ext>
             </a:extLst>
           </p:cNvPr>
@@ -3673,7 +3673,7 @@
           <p:cNvPr id="9" name="">
             <a:extLst xmlns:a="http://schemas.openxmlformats.org/drawingml/2006/main">
               <a:ext uri="{FF2B5EF4-FFF2-40B4-BE49-F238E27FC236}">
-                <a16:creationId xmlns:a16="http://schemas.microsoft.com/office/drawing/2014/main" id="{BA81DE26-200F-4FA0-8BCF-0D431DC71871}"/>
+                <a16:creationId xmlns:a16="http://schemas.microsoft.com/office/drawing/2014/main" id="{199803F7-8925-4078-9B86-8FD959787777}"/>
               </a:ext>
             </a:extLst>
           </p:cNvPr>
@@ -3730,7 +3730,7 @@
           <p:cNvPr id="10" name="">
             <a:extLst xmlns:a="http://schemas.openxmlformats.org/drawingml/2006/main">
               <a:ext uri="{FF2B5EF4-FFF2-40B4-BE49-F238E27FC236}">
-                <a16:creationId xmlns:a16="http://schemas.microsoft.com/office/drawing/2014/main" id="{93D203DE-CB45-471F-883B-7D2B730857D6}"/>
+                <a16:creationId xmlns:a16="http://schemas.microsoft.com/office/drawing/2014/main" id="{E4D80A49-4EB6-4275-9861-D1340D274E05}"/>
               </a:ext>
             </a:extLst>
           </p:cNvPr>
@@ -3787,7 +3787,7 @@
           <p:cNvPr id="11" name="">
             <a:extLst xmlns:a="http://schemas.openxmlformats.org/drawingml/2006/main">
               <a:ext uri="{FF2B5EF4-FFF2-40B4-BE49-F238E27FC236}">
-                <a16:creationId xmlns:a16="http://schemas.microsoft.com/office/drawing/2014/main" id="{69A17581-C02E-4866-AF50-3F0F05A7370A}"/>
+                <a16:creationId xmlns:a16="http://schemas.microsoft.com/office/drawing/2014/main" id="{9AC80B76-68D1-4256-839A-1032DDCC69FE}"/>
               </a:ext>
             </a:extLst>
           </p:cNvPr>
@@ -3821,7 +3821,7 @@
           <p:cNvPr id="12" name="">
             <a:extLst xmlns:a="http://schemas.openxmlformats.org/drawingml/2006/main">
               <a:ext uri="{FF2B5EF4-FFF2-40B4-BE49-F238E27FC236}">
-                <a16:creationId xmlns:a16="http://schemas.microsoft.com/office/drawing/2014/main" id="{848FE934-F883-4CE6-AEB3-5C24233CB3B3}"/>
+                <a16:creationId xmlns:a16="http://schemas.microsoft.com/office/drawing/2014/main" id="{DFE11C65-269A-41B4-B47D-409C6112230D}"/>
               </a:ext>
             </a:extLst>
           </p:cNvPr>
@@ -3878,7 +3878,7 @@
           <p:cNvPr id="13" name="">
             <a:extLst xmlns:a="http://schemas.openxmlformats.org/drawingml/2006/main">
               <a:ext uri="{FF2B5EF4-FFF2-40B4-BE49-F238E27FC236}">
-                <a16:creationId xmlns:a16="http://schemas.microsoft.com/office/drawing/2014/main" id="{2CAB0069-C909-4D1D-BCE1-3298CC06B03A}"/>
+                <a16:creationId xmlns:a16="http://schemas.microsoft.com/office/drawing/2014/main" id="{57ECC5FD-BB18-4DA7-94F2-3EC9DA4C6ABE}"/>
               </a:ext>
             </a:extLst>
           </p:cNvPr>
@@ -3935,7 +3935,7 @@
           <p:cNvPr id="14" name="">
             <a:extLst xmlns:a="http://schemas.openxmlformats.org/drawingml/2006/main">
               <a:ext uri="{FF2B5EF4-FFF2-40B4-BE49-F238E27FC236}">
-                <a16:creationId xmlns:a16="http://schemas.microsoft.com/office/drawing/2014/main" id="{4983D9E5-8A20-4362-B2F5-CD276F42E028}"/>
+                <a16:creationId xmlns:a16="http://schemas.microsoft.com/office/drawing/2014/main" id="{B6F5633E-F90A-4A22-9447-5D4F0C9F81E7}"/>
               </a:ext>
             </a:extLst>
           </p:cNvPr>
@@ -3992,7 +3992,7 @@
           <p:cNvPr id="15" name="">
             <a:extLst xmlns:a="http://schemas.openxmlformats.org/drawingml/2006/main">
               <a:ext uri="{FF2B5EF4-FFF2-40B4-BE49-F238E27FC236}">
-                <a16:creationId xmlns:a16="http://schemas.microsoft.com/office/drawing/2014/main" id="{DC441A52-D79F-4B35-A1D3-22B0BEAAD64D}"/>
+                <a16:creationId xmlns:a16="http://schemas.microsoft.com/office/drawing/2014/main" id="{D6B21046-A1A4-4763-8D4B-7158B55F611F}"/>
               </a:ext>
             </a:extLst>
           </p:cNvPr>
@@ -4026,7 +4026,7 @@
           <p:cNvPr id="16" name="">
             <a:extLst xmlns:a="http://schemas.openxmlformats.org/drawingml/2006/main">
               <a:ext uri="{FF2B5EF4-FFF2-40B4-BE49-F238E27FC236}">
-                <a16:creationId xmlns:a16="http://schemas.microsoft.com/office/drawing/2014/main" id="{3DCE657E-DE18-4AE7-8388-94ED32C3926B}"/>
+                <a16:creationId xmlns:a16="http://schemas.microsoft.com/office/drawing/2014/main" id="{6CFEBEF5-900A-4F53-8717-8C6204241493}"/>
               </a:ext>
             </a:extLst>
           </p:cNvPr>
@@ -4083,7 +4083,7 @@
           <p:cNvPr id="17" name="">
             <a:extLst xmlns:a="http://schemas.openxmlformats.org/drawingml/2006/main">
               <a:ext uri="{FF2B5EF4-FFF2-40B4-BE49-F238E27FC236}">
-                <a16:creationId xmlns:a16="http://schemas.microsoft.com/office/drawing/2014/main" id="{7AD9375D-05B7-4FA4-B7EF-BB5AC639F475}"/>
+                <a16:creationId xmlns:a16="http://schemas.microsoft.com/office/drawing/2014/main" id="{7E9E5278-D0A8-4D89-A1CE-1D59B4C9EBB5}"/>
               </a:ext>
             </a:extLst>
           </p:cNvPr>
@@ -4140,7 +4140,7 @@
           <p:cNvPr id="18" name="">
             <a:extLst xmlns:a="http://schemas.openxmlformats.org/drawingml/2006/main">
               <a:ext uri="{FF2B5EF4-FFF2-40B4-BE49-F238E27FC236}">
-                <a16:creationId xmlns:a16="http://schemas.microsoft.com/office/drawing/2014/main" id="{1DD95016-FB20-4167-8F92-E5EB751DE55B}"/>
+                <a16:creationId xmlns:a16="http://schemas.microsoft.com/office/drawing/2014/main" id="{E7B23241-49AB-40C3-A51A-5528AEC57B70}"/>
               </a:ext>
             </a:extLst>
           </p:cNvPr>
@@ -4195,7 +4195,7 @@
     </p:spTree>
     <p:extLst>
       <p:ext uri="{BB962C8B-B14F-4D97-AF65-F5344CB8AC3E}">
-        <p14:creationId xmlns:p14="http://schemas.microsoft.com/office/powerpoint/2010/main" val="2000405091"/>
+        <p14:creationId xmlns:p14="http://schemas.microsoft.com/office/powerpoint/2010/main" val="1818775292"/>
       </p:ext>
     </p:extLst>
   </p:cSld>
@@ -4350,7 +4350,7 @@
           <p:cNvPr id="23" name="">
             <a:extLst xmlns:a="http://schemas.openxmlformats.org/drawingml/2006/main">
               <a:ext uri="{FF2B5EF4-FFF2-40B4-BE49-F238E27FC236}">
-                <a16:creationId xmlns:a16="http://schemas.microsoft.com/office/drawing/2014/main" id="{97939C78-1244-4102-9A3A-966437DA590D}"/>
+                <a16:creationId xmlns:a16="http://schemas.microsoft.com/office/drawing/2014/main" id="{5F38C46E-431A-4AEC-A68D-4C97A220EDE6}"/>
               </a:ext>
             </a:extLst>
           </p:cNvPr>
@@ -4382,7 +4382,7 @@
           <p:cNvPr id="2" name="">
             <a:extLst xmlns:a="http://schemas.openxmlformats.org/drawingml/2006/main">
               <a:ext uri="{FF2B5EF4-FFF2-40B4-BE49-F238E27FC236}">
-                <a16:creationId xmlns:a16="http://schemas.microsoft.com/office/drawing/2014/main" id="{D1FF49D6-3F06-400B-8959-8FA359681A16}"/>
+                <a16:creationId xmlns:a16="http://schemas.microsoft.com/office/drawing/2014/main" id="{1A4A37FF-AB8F-4594-8DB0-579D612DBE34}"/>
               </a:ext>
             </a:extLst>
           </p:cNvPr>
@@ -4439,7 +4439,7 @@
           <p:cNvPr id="3" name="">
             <a:extLst xmlns:a="http://schemas.openxmlformats.org/drawingml/2006/main">
               <a:ext uri="{FF2B5EF4-FFF2-40B4-BE49-F238E27FC236}">
-                <a16:creationId xmlns:a16="http://schemas.microsoft.com/office/drawing/2014/main" id="{A62AA46F-623A-4609-8ED3-CD5C7DEEC107}"/>
+                <a16:creationId xmlns:a16="http://schemas.microsoft.com/office/drawing/2014/main" id="{45985B38-E9B1-4F47-8D21-B0DD09F13F3E}"/>
               </a:ext>
             </a:extLst>
           </p:cNvPr>
@@ -4471,7 +4471,7 @@
           <p:cNvPr id="4" name="">
             <a:extLst xmlns:a="http://schemas.openxmlformats.org/drawingml/2006/main">
               <a:ext uri="{FF2B5EF4-FFF2-40B4-BE49-F238E27FC236}">
-                <a16:creationId xmlns:a16="http://schemas.microsoft.com/office/drawing/2014/main" id="{02895F51-F68C-4781-8BE0-D9E97E532845}"/>
+                <a16:creationId xmlns:a16="http://schemas.microsoft.com/office/drawing/2014/main" id="{C1F9386D-ABF3-4B30-8BD7-4E608CEF9596}"/>
               </a:ext>
             </a:extLst>
           </p:cNvPr>
@@ -4528,7 +4528,7 @@
           <p:cNvPr id="5" name="">
             <a:extLst xmlns:a="http://schemas.openxmlformats.org/drawingml/2006/main">
               <a:ext uri="{FF2B5EF4-FFF2-40B4-BE49-F238E27FC236}">
-                <a16:creationId xmlns:a16="http://schemas.microsoft.com/office/drawing/2014/main" id="{91FD5A43-9607-462D-AD43-A9FB7A542119}"/>
+                <a16:creationId xmlns:a16="http://schemas.microsoft.com/office/drawing/2014/main" id="{303F8CCF-FCCA-45E8-AFA5-BAAC851AE2F7}"/>
               </a:ext>
             </a:extLst>
           </p:cNvPr>
@@ -4585,7 +4585,7 @@
           <p:cNvPr id="6" name="">
             <a:extLst xmlns:a="http://schemas.openxmlformats.org/drawingml/2006/main">
               <a:ext uri="{FF2B5EF4-FFF2-40B4-BE49-F238E27FC236}">
-                <a16:creationId xmlns:a16="http://schemas.microsoft.com/office/drawing/2014/main" id="{05073B5D-34B0-4A18-BD24-7051BFC92A8E}"/>
+                <a16:creationId xmlns:a16="http://schemas.microsoft.com/office/drawing/2014/main" id="{39714D09-D313-4196-85F2-5D70DE925667}"/>
               </a:ext>
             </a:extLst>
           </p:cNvPr>
@@ -4642,7 +4642,7 @@
           <p:cNvPr id="7" name="">
             <a:extLst xmlns:a="http://schemas.openxmlformats.org/drawingml/2006/main">
               <a:ext uri="{FF2B5EF4-FFF2-40B4-BE49-F238E27FC236}">
-                <a16:creationId xmlns:a16="http://schemas.microsoft.com/office/drawing/2014/main" id="{DB4D232C-6602-406D-845E-DA712CD6FBAF}"/>
+                <a16:creationId xmlns:a16="http://schemas.microsoft.com/office/drawing/2014/main" id="{41D5F60E-E927-4639-9F2C-F98B53FAA713}"/>
               </a:ext>
             </a:extLst>
           </p:cNvPr>
@@ -4674,7 +4674,7 @@
           <p:cNvPr id="8" name="">
             <a:extLst xmlns:a="http://schemas.openxmlformats.org/drawingml/2006/main">
               <a:ext uri="{FF2B5EF4-FFF2-40B4-BE49-F238E27FC236}">
-                <a16:creationId xmlns:a16="http://schemas.microsoft.com/office/drawing/2014/main" id="{B84A0210-4854-4790-AF7A-86AAEDDBEE81}"/>
+                <a16:creationId xmlns:a16="http://schemas.microsoft.com/office/drawing/2014/main" id="{68EB662D-007B-497A-A773-3183C1350972}"/>
               </a:ext>
             </a:extLst>
           </p:cNvPr>
@@ -4731,7 +4731,7 @@
           <p:cNvPr id="9" name="">
             <a:extLst xmlns:a="http://schemas.openxmlformats.org/drawingml/2006/main">
               <a:ext uri="{FF2B5EF4-FFF2-40B4-BE49-F238E27FC236}">
-                <a16:creationId xmlns:a16="http://schemas.microsoft.com/office/drawing/2014/main" id="{AEE56D73-31FE-403B-B2FD-DC786B57D09B}"/>
+                <a16:creationId xmlns:a16="http://schemas.microsoft.com/office/drawing/2014/main" id="{4AE6CB72-CB3C-4E4D-9E1E-BC5011536482}"/>
               </a:ext>
             </a:extLst>
           </p:cNvPr>
@@ -4788,7 +4788,7 @@
           <p:cNvPr id="10" name="">
             <a:extLst xmlns:a="http://schemas.openxmlformats.org/drawingml/2006/main">
               <a:ext uri="{FF2B5EF4-FFF2-40B4-BE49-F238E27FC236}">
-                <a16:creationId xmlns:a16="http://schemas.microsoft.com/office/drawing/2014/main" id="{54AB6306-4DC8-4EBC-A8D6-498DF3986BC9}"/>
+                <a16:creationId xmlns:a16="http://schemas.microsoft.com/office/drawing/2014/main" id="{DB00A222-A9B2-448A-A2E6-51B7A298CC3C}"/>
               </a:ext>
             </a:extLst>
           </p:cNvPr>
@@ -4822,7 +4822,7 @@
           <p:cNvPr id="11" name="">
             <a:extLst xmlns:a="http://schemas.openxmlformats.org/drawingml/2006/main">
               <a:ext uri="{FF2B5EF4-FFF2-40B4-BE49-F238E27FC236}">
-                <a16:creationId xmlns:a16="http://schemas.microsoft.com/office/drawing/2014/main" id="{E9F28493-EBE0-42C2-9170-844F6F5B2B32}"/>
+                <a16:creationId xmlns:a16="http://schemas.microsoft.com/office/drawing/2014/main" id="{CC38A18C-BC14-4D71-89EC-79A9871C9C0F}"/>
               </a:ext>
             </a:extLst>
           </p:cNvPr>
@@ -4854,7 +4854,7 @@
           <p:cNvPr id="12" name="">
             <a:extLst xmlns:a="http://schemas.openxmlformats.org/drawingml/2006/main">
               <a:ext uri="{FF2B5EF4-FFF2-40B4-BE49-F238E27FC236}">
-                <a16:creationId xmlns:a16="http://schemas.microsoft.com/office/drawing/2014/main" id="{1E7B15D2-FD01-4D69-BFE0-0986B63DE056}"/>
+                <a16:creationId xmlns:a16="http://schemas.microsoft.com/office/drawing/2014/main" id="{C87D7476-105B-4683-A73A-CE5B8CC03C9E}"/>
               </a:ext>
             </a:extLst>
           </p:cNvPr>
@@ -4911,7 +4911,7 @@
           <p:cNvPr id="13" name="">
             <a:extLst xmlns:a="http://schemas.openxmlformats.org/drawingml/2006/main">
               <a:ext uri="{FF2B5EF4-FFF2-40B4-BE49-F238E27FC236}">
-                <a16:creationId xmlns:a16="http://schemas.microsoft.com/office/drawing/2014/main" id="{985A336B-1DC0-46B3-837E-56EBC8F53672}"/>
+                <a16:creationId xmlns:a16="http://schemas.microsoft.com/office/drawing/2014/main" id="{836BD5BC-26AB-4B18-975F-EF3069D24C79}"/>
               </a:ext>
             </a:extLst>
           </p:cNvPr>
@@ -4968,7 +4968,7 @@
           <p:cNvPr id="14" name="">
             <a:extLst xmlns:a="http://schemas.openxmlformats.org/drawingml/2006/main">
               <a:ext uri="{FF2B5EF4-FFF2-40B4-BE49-F238E27FC236}">
-                <a16:creationId xmlns:a16="http://schemas.microsoft.com/office/drawing/2014/main" id="{3E6AAA6D-A7FA-43F3-B2C8-B9600FAB7971}"/>
+                <a16:creationId xmlns:a16="http://schemas.microsoft.com/office/drawing/2014/main" id="{992CD69D-90D4-48F5-AF5E-9C6A3B7BDFB5}"/>
               </a:ext>
             </a:extLst>
           </p:cNvPr>
@@ -5002,7 +5002,7 @@
           <p:cNvPr id="15" name="">
             <a:extLst xmlns:a="http://schemas.openxmlformats.org/drawingml/2006/main">
               <a:ext uri="{FF2B5EF4-FFF2-40B4-BE49-F238E27FC236}">
-                <a16:creationId xmlns:a16="http://schemas.microsoft.com/office/drawing/2014/main" id="{54B5872D-8132-4E2A-92E5-7DF4C62D5055}"/>
+                <a16:creationId xmlns:a16="http://schemas.microsoft.com/office/drawing/2014/main" id="{FF262BA8-BA72-47FE-8AB2-9BBC09D15120}"/>
               </a:ext>
             </a:extLst>
           </p:cNvPr>
@@ -5034,7 +5034,7 @@
           <p:cNvPr id="16" name="">
             <a:extLst xmlns:a="http://schemas.openxmlformats.org/drawingml/2006/main">
               <a:ext uri="{FF2B5EF4-FFF2-40B4-BE49-F238E27FC236}">
-                <a16:creationId xmlns:a16="http://schemas.microsoft.com/office/drawing/2014/main" id="{2F60E89B-3135-4555-BB0D-ED5572B8667E}"/>
+                <a16:creationId xmlns:a16="http://schemas.microsoft.com/office/drawing/2014/main" id="{B6DB5D74-01B9-41B4-A33E-E472153E0148}"/>
               </a:ext>
             </a:extLst>
           </p:cNvPr>
@@ -5091,7 +5091,7 @@
           <p:cNvPr id="17" name="">
             <a:extLst xmlns:a="http://schemas.openxmlformats.org/drawingml/2006/main">
               <a:ext uri="{FF2B5EF4-FFF2-40B4-BE49-F238E27FC236}">
-                <a16:creationId xmlns:a16="http://schemas.microsoft.com/office/drawing/2014/main" id="{9B0510D7-0C06-4140-AD34-1E6F4070C72A}"/>
+                <a16:creationId xmlns:a16="http://schemas.microsoft.com/office/drawing/2014/main" id="{6A99311F-C238-4B80-A215-E0EB7990FEC6}"/>
               </a:ext>
             </a:extLst>
           </p:cNvPr>
@@ -5148,7 +5148,7 @@
           <p:cNvPr id="18" name="">
             <a:extLst xmlns:a="http://schemas.openxmlformats.org/drawingml/2006/main">
               <a:ext uri="{FF2B5EF4-FFF2-40B4-BE49-F238E27FC236}">
-                <a16:creationId xmlns:a16="http://schemas.microsoft.com/office/drawing/2014/main" id="{A4812A96-451B-48F7-80A6-7D80C621E419}"/>
+                <a16:creationId xmlns:a16="http://schemas.microsoft.com/office/drawing/2014/main" id="{2A8D8B41-B4EB-48D1-81E7-A8079FC47C8A}"/>
               </a:ext>
             </a:extLst>
           </p:cNvPr>
@@ -5182,7 +5182,7 @@
           <p:cNvPr id="19" name="">
             <a:extLst xmlns:a="http://schemas.openxmlformats.org/drawingml/2006/main">
               <a:ext uri="{FF2B5EF4-FFF2-40B4-BE49-F238E27FC236}">
-                <a16:creationId xmlns:a16="http://schemas.microsoft.com/office/drawing/2014/main" id="{E484B847-AB1D-4FDE-81B3-655666BA5669}"/>
+                <a16:creationId xmlns:a16="http://schemas.microsoft.com/office/drawing/2014/main" id="{F97829D5-B6AC-4E22-B03D-CED6F1E25002}"/>
               </a:ext>
             </a:extLst>
           </p:cNvPr>
@@ -5214,7 +5214,7 @@
           <p:cNvPr id="20" name="">
             <a:extLst xmlns:a="http://schemas.openxmlformats.org/drawingml/2006/main">
               <a:ext uri="{FF2B5EF4-FFF2-40B4-BE49-F238E27FC236}">
-                <a16:creationId xmlns:a16="http://schemas.microsoft.com/office/drawing/2014/main" id="{1A008EB5-3695-43E3-939D-C1E9B7C67DD0}"/>
+                <a16:creationId xmlns:a16="http://schemas.microsoft.com/office/drawing/2014/main" id="{8A9079CC-B443-4444-ACF0-82F5E1B85DC5}"/>
               </a:ext>
             </a:extLst>
           </p:cNvPr>
@@ -5271,7 +5271,7 @@
           <p:cNvPr id="21" name="">
             <a:extLst xmlns:a="http://schemas.openxmlformats.org/drawingml/2006/main">
               <a:ext uri="{FF2B5EF4-FFF2-40B4-BE49-F238E27FC236}">
-                <a16:creationId xmlns:a16="http://schemas.microsoft.com/office/drawing/2014/main" id="{4FBCE719-AF93-425E-B1E9-AB7C56246768}"/>
+                <a16:creationId xmlns:a16="http://schemas.microsoft.com/office/drawing/2014/main" id="{99EB9D25-6438-4AD1-A302-EFDFF1869276}"/>
               </a:ext>
             </a:extLst>
           </p:cNvPr>
@@ -5328,7 +5328,7 @@
           <p:cNvPr id="22" name="">
             <a:extLst xmlns:a="http://schemas.openxmlformats.org/drawingml/2006/main">
               <a:ext uri="{FF2B5EF4-FFF2-40B4-BE49-F238E27FC236}">
-                <a16:creationId xmlns:a16="http://schemas.microsoft.com/office/drawing/2014/main" id="{FAA087B9-F97C-4C9E-953F-81B0AFB28278}"/>
+                <a16:creationId xmlns:a16="http://schemas.microsoft.com/office/drawing/2014/main" id="{D296A945-3F9C-4003-BA82-EDD503F04E4F}"/>
               </a:ext>
             </a:extLst>
           </p:cNvPr>
@@ -5383,7 +5383,7 @@
     </p:spTree>
     <p:extLst>
       <p:ext uri="{BB962C8B-B14F-4D97-AF65-F5344CB8AC3E}">
-        <p14:creationId xmlns:p14="http://schemas.microsoft.com/office/powerpoint/2010/main" val="302064192"/>
+        <p14:creationId xmlns:p14="http://schemas.microsoft.com/office/powerpoint/2010/main" val="1222941977"/>
       </p:ext>
     </p:extLst>
   </p:cSld>
@@ -5584,7 +5584,7 @@
           <p:cNvPr id="23" name="">
             <a:extLst xmlns:a="http://schemas.openxmlformats.org/drawingml/2006/main">
               <a:ext uri="{FF2B5EF4-FFF2-40B4-BE49-F238E27FC236}">
-                <a16:creationId xmlns:a16="http://schemas.microsoft.com/office/drawing/2014/main" id="{95CE5A24-6440-4C20-A2B2-449398616AF4}"/>
+                <a16:creationId xmlns:a16="http://schemas.microsoft.com/office/drawing/2014/main" id="{2E094A24-8CD6-4B0D-8B91-177F1C9308C1}"/>
               </a:ext>
             </a:extLst>
           </p:cNvPr>
@@ -5616,7 +5616,7 @@
           <p:cNvPr id="2" name="">
             <a:extLst xmlns:a="http://schemas.openxmlformats.org/drawingml/2006/main">
               <a:ext uri="{FF2B5EF4-FFF2-40B4-BE49-F238E27FC236}">
-                <a16:creationId xmlns:a16="http://schemas.microsoft.com/office/drawing/2014/main" id="{469E79CD-7BD7-40A0-A57B-3E882CD33CA3}"/>
+                <a16:creationId xmlns:a16="http://schemas.microsoft.com/office/drawing/2014/main" id="{286EEB23-9475-47F4-8215-D5B3E332E49F}"/>
               </a:ext>
             </a:extLst>
           </p:cNvPr>
@@ -5673,7 +5673,7 @@
           <p:cNvPr id="3" name="">
             <a:extLst xmlns:a="http://schemas.openxmlformats.org/drawingml/2006/main">
               <a:ext uri="{FF2B5EF4-FFF2-40B4-BE49-F238E27FC236}">
-                <a16:creationId xmlns:a16="http://schemas.microsoft.com/office/drawing/2014/main" id="{FA00BE07-4F8D-4E75-814D-3E1FB2FC9466}"/>
+                <a16:creationId xmlns:a16="http://schemas.microsoft.com/office/drawing/2014/main" id="{D3002BBD-6893-49FB-9398-AFB912D84A73}"/>
               </a:ext>
             </a:extLst>
           </p:cNvPr>
@@ -5705,7 +5705,7 @@
           <p:cNvPr id="4" name="">
             <a:extLst xmlns:a="http://schemas.openxmlformats.org/drawingml/2006/main">
               <a:ext uri="{FF2B5EF4-FFF2-40B4-BE49-F238E27FC236}">
-                <a16:creationId xmlns:a16="http://schemas.microsoft.com/office/drawing/2014/main" id="{07A637AA-BBE0-4474-B4DF-A4BBEB23C778}"/>
+                <a16:creationId xmlns:a16="http://schemas.microsoft.com/office/drawing/2014/main" id="{F418DE8A-E2C6-45C5-9E5F-A4AB44FF9C34}"/>
               </a:ext>
             </a:extLst>
           </p:cNvPr>
@@ -5762,7 +5762,7 @@
           <p:cNvPr id="5" name="">
             <a:extLst xmlns:a="http://schemas.openxmlformats.org/drawingml/2006/main">
               <a:ext uri="{FF2B5EF4-FFF2-40B4-BE49-F238E27FC236}">
-                <a16:creationId xmlns:a16="http://schemas.microsoft.com/office/drawing/2014/main" id="{8E0EEA07-CF1F-45AE-A899-1570FAC3FA6B}"/>
+                <a16:creationId xmlns:a16="http://schemas.microsoft.com/office/drawing/2014/main" id="{FF0F038A-B11C-48B8-A12E-36CC48F50196}"/>
               </a:ext>
             </a:extLst>
           </p:cNvPr>
@@ -5819,7 +5819,7 @@
           <p:cNvPr id="6" name="">
             <a:extLst xmlns:a="http://schemas.openxmlformats.org/drawingml/2006/main">
               <a:ext uri="{FF2B5EF4-FFF2-40B4-BE49-F238E27FC236}">
-                <a16:creationId xmlns:a16="http://schemas.microsoft.com/office/drawing/2014/main" id="{FA404C05-79F4-4BC0-9141-6FD41E93F0D4}"/>
+                <a16:creationId xmlns:a16="http://schemas.microsoft.com/office/drawing/2014/main" id="{86F343B6-7173-43E8-88E5-5C226B4738D0}"/>
               </a:ext>
             </a:extLst>
           </p:cNvPr>
@@ -5876,7 +5876,7 @@
           <p:cNvPr id="7" name="">
             <a:extLst xmlns:a="http://schemas.openxmlformats.org/drawingml/2006/main">
               <a:ext uri="{FF2B5EF4-FFF2-40B4-BE49-F238E27FC236}">
-                <a16:creationId xmlns:a16="http://schemas.microsoft.com/office/drawing/2014/main" id="{4A3E05B0-FED4-46D3-ABEC-153828B1D677}"/>
+                <a16:creationId xmlns:a16="http://schemas.microsoft.com/office/drawing/2014/main" id="{904E753C-32DE-40CF-8902-519FBD5CDC12}"/>
               </a:ext>
             </a:extLst>
           </p:cNvPr>
@@ -5908,7 +5908,7 @@
           <p:cNvPr id="8" name="">
             <a:extLst xmlns:a="http://schemas.openxmlformats.org/drawingml/2006/main">
               <a:ext uri="{FF2B5EF4-FFF2-40B4-BE49-F238E27FC236}">
-                <a16:creationId xmlns:a16="http://schemas.microsoft.com/office/drawing/2014/main" id="{41EAA441-DF1A-4CCE-A497-338404DB1DFF}"/>
+                <a16:creationId xmlns:a16="http://schemas.microsoft.com/office/drawing/2014/main" id="{18DC6300-0004-4A72-9C15-E3BD8D3A1AA3}"/>
               </a:ext>
             </a:extLst>
           </p:cNvPr>
@@ -5965,7 +5965,7 @@
           <p:cNvPr id="9" name="">
             <a:extLst xmlns:a="http://schemas.openxmlformats.org/drawingml/2006/main">
               <a:ext uri="{FF2B5EF4-FFF2-40B4-BE49-F238E27FC236}">
-                <a16:creationId xmlns:a16="http://schemas.microsoft.com/office/drawing/2014/main" id="{46821B08-68C5-4345-9EDD-93647BCA78C6}"/>
+                <a16:creationId xmlns:a16="http://schemas.microsoft.com/office/drawing/2014/main" id="{8CBCF9FE-AFA1-4E4B-9972-45A9C602AA09}"/>
               </a:ext>
             </a:extLst>
           </p:cNvPr>
@@ -6022,7 +6022,7 @@
           <p:cNvPr id="10" name="">
             <a:extLst xmlns:a="http://schemas.openxmlformats.org/drawingml/2006/main">
               <a:ext uri="{FF2B5EF4-FFF2-40B4-BE49-F238E27FC236}">
-                <a16:creationId xmlns:a16="http://schemas.microsoft.com/office/drawing/2014/main" id="{92C3DFF1-273A-427E-B654-1F113D8516ED}"/>
+                <a16:creationId xmlns:a16="http://schemas.microsoft.com/office/drawing/2014/main" id="{BB24650D-2504-4540-92B7-543FD20A2108}"/>
               </a:ext>
             </a:extLst>
           </p:cNvPr>
@@ -6056,7 +6056,7 @@
           <p:cNvPr id="11" name="">
             <a:extLst xmlns:a="http://schemas.openxmlformats.org/drawingml/2006/main">
               <a:ext uri="{FF2B5EF4-FFF2-40B4-BE49-F238E27FC236}">
-                <a16:creationId xmlns:a16="http://schemas.microsoft.com/office/drawing/2014/main" id="{EEEF5D7A-218E-4A54-AC43-CB3E00169A45}"/>
+                <a16:creationId xmlns:a16="http://schemas.microsoft.com/office/drawing/2014/main" id="{4E4E3B7A-4209-41AD-9C1A-852E327CD8A5}"/>
               </a:ext>
             </a:extLst>
           </p:cNvPr>
@@ -6088,7 +6088,7 @@
           <p:cNvPr id="12" name="">
             <a:extLst xmlns:a="http://schemas.openxmlformats.org/drawingml/2006/main">
               <a:ext uri="{FF2B5EF4-FFF2-40B4-BE49-F238E27FC236}">
-                <a16:creationId xmlns:a16="http://schemas.microsoft.com/office/drawing/2014/main" id="{0D227589-2A93-4BE8-BEFA-D08A276612E0}"/>
+                <a16:creationId xmlns:a16="http://schemas.microsoft.com/office/drawing/2014/main" id="{C859E275-F68F-4804-8948-5C46BED0330C}"/>
               </a:ext>
             </a:extLst>
           </p:cNvPr>
@@ -6145,7 +6145,7 @@
           <p:cNvPr id="13" name="">
             <a:extLst xmlns:a="http://schemas.openxmlformats.org/drawingml/2006/main">
               <a:ext uri="{FF2B5EF4-FFF2-40B4-BE49-F238E27FC236}">
-                <a16:creationId xmlns:a16="http://schemas.microsoft.com/office/drawing/2014/main" id="{974F1B26-40C7-4437-BC1D-9E72F5C08F26}"/>
+                <a16:creationId xmlns:a16="http://schemas.microsoft.com/office/drawing/2014/main" id="{E665B5E4-5862-4D21-B9E5-FC2A61B8C224}"/>
               </a:ext>
             </a:extLst>
           </p:cNvPr>
@@ -6202,7 +6202,7 @@
           <p:cNvPr id="14" name="">
             <a:extLst xmlns:a="http://schemas.openxmlformats.org/drawingml/2006/main">
               <a:ext uri="{FF2B5EF4-FFF2-40B4-BE49-F238E27FC236}">
-                <a16:creationId xmlns:a16="http://schemas.microsoft.com/office/drawing/2014/main" id="{74342942-7619-467A-B3FA-C83D8278E0DB}"/>
+                <a16:creationId xmlns:a16="http://schemas.microsoft.com/office/drawing/2014/main" id="{412DB014-A071-4AE6-9BD2-1FE33C837BAD}"/>
               </a:ext>
             </a:extLst>
           </p:cNvPr>
@@ -6236,7 +6236,7 @@
           <p:cNvPr id="15" name="">
             <a:extLst xmlns:a="http://schemas.openxmlformats.org/drawingml/2006/main">
               <a:ext uri="{FF2B5EF4-FFF2-40B4-BE49-F238E27FC236}">
-                <a16:creationId xmlns:a16="http://schemas.microsoft.com/office/drawing/2014/main" id="{E60CC393-C48B-4D25-ACC4-718D4EB30AFA}"/>
+                <a16:creationId xmlns:a16="http://schemas.microsoft.com/office/drawing/2014/main" id="{3E86ACFC-612F-4139-B1B3-522C0A939285}"/>
               </a:ext>
             </a:extLst>
           </p:cNvPr>
@@ -6268,7 +6268,7 @@
           <p:cNvPr id="16" name="">
             <a:extLst xmlns:a="http://schemas.openxmlformats.org/drawingml/2006/main">
               <a:ext uri="{FF2B5EF4-FFF2-40B4-BE49-F238E27FC236}">
-                <a16:creationId xmlns:a16="http://schemas.microsoft.com/office/drawing/2014/main" id="{2D5FE424-8E9B-4523-B898-15514571B4C5}"/>
+                <a16:creationId xmlns:a16="http://schemas.microsoft.com/office/drawing/2014/main" id="{B36F4EC4-1E25-40C3-A132-28B8B19EEC71}"/>
               </a:ext>
             </a:extLst>
           </p:cNvPr>
@@ -6325,7 +6325,7 @@
           <p:cNvPr id="17" name="">
             <a:extLst xmlns:a="http://schemas.openxmlformats.org/drawingml/2006/main">
               <a:ext uri="{FF2B5EF4-FFF2-40B4-BE49-F238E27FC236}">
-                <a16:creationId xmlns:a16="http://schemas.microsoft.com/office/drawing/2014/main" id="{9B197F36-C710-4109-94A5-58DEE9445EC5}"/>
+                <a16:creationId xmlns:a16="http://schemas.microsoft.com/office/drawing/2014/main" id="{C86B3C2C-0FBB-4C1E-BBD2-1235261CE471}"/>
               </a:ext>
             </a:extLst>
           </p:cNvPr>
@@ -6382,7 +6382,7 @@
           <p:cNvPr id="18" name="">
             <a:extLst xmlns:a="http://schemas.openxmlformats.org/drawingml/2006/main">
               <a:ext uri="{FF2B5EF4-FFF2-40B4-BE49-F238E27FC236}">
-                <a16:creationId xmlns:a16="http://schemas.microsoft.com/office/drawing/2014/main" id="{C72CAF60-CBF9-4E48-803B-3FD225BC4A68}"/>
+                <a16:creationId xmlns:a16="http://schemas.microsoft.com/office/drawing/2014/main" id="{B02CE6EE-9281-42D5-A029-209F425AFE55}"/>
               </a:ext>
             </a:extLst>
           </p:cNvPr>
@@ -6416,7 +6416,7 @@
           <p:cNvPr id="19" name="">
             <a:extLst xmlns:a="http://schemas.openxmlformats.org/drawingml/2006/main">
               <a:ext uri="{FF2B5EF4-FFF2-40B4-BE49-F238E27FC236}">
-                <a16:creationId xmlns:a16="http://schemas.microsoft.com/office/drawing/2014/main" id="{BBEA531A-994D-4190-8DF2-384E31810494}"/>
+                <a16:creationId xmlns:a16="http://schemas.microsoft.com/office/drawing/2014/main" id="{55AD489D-19B3-42DC-ABED-D94A916C9F93}"/>
               </a:ext>
             </a:extLst>
           </p:cNvPr>
@@ -6448,7 +6448,7 @@
           <p:cNvPr id="20" name="">
             <a:extLst xmlns:a="http://schemas.openxmlformats.org/drawingml/2006/main">
               <a:ext uri="{FF2B5EF4-FFF2-40B4-BE49-F238E27FC236}">
-                <a16:creationId xmlns:a16="http://schemas.microsoft.com/office/drawing/2014/main" id="{D0E9081B-3855-498D-BAD9-D078ABEBC5D6}"/>
+                <a16:creationId xmlns:a16="http://schemas.microsoft.com/office/drawing/2014/main" id="{38330278-BD0A-4D4E-81D6-6F84FCFEE1E5}"/>
               </a:ext>
             </a:extLst>
           </p:cNvPr>
@@ -6505,7 +6505,7 @@
           <p:cNvPr id="21" name="">
             <a:extLst xmlns:a="http://schemas.openxmlformats.org/drawingml/2006/main">
               <a:ext uri="{FF2B5EF4-FFF2-40B4-BE49-F238E27FC236}">
-                <a16:creationId xmlns:a16="http://schemas.microsoft.com/office/drawing/2014/main" id="{7121B02E-5D1B-4EB3-9CF5-B8AD6FD50CC9}"/>
+                <a16:creationId xmlns:a16="http://schemas.microsoft.com/office/drawing/2014/main" id="{BD71A91C-738B-4D5C-87E4-0C8F4B985D32}"/>
               </a:ext>
             </a:extLst>
           </p:cNvPr>
@@ -6562,7 +6562,7 @@
           <p:cNvPr id="22" name="">
             <a:extLst xmlns:a="http://schemas.openxmlformats.org/drawingml/2006/main">
               <a:ext uri="{FF2B5EF4-FFF2-40B4-BE49-F238E27FC236}">
-                <a16:creationId xmlns:a16="http://schemas.microsoft.com/office/drawing/2014/main" id="{BF466C75-20F1-49E2-A2E6-0EE426FDE06A}"/>
+                <a16:creationId xmlns:a16="http://schemas.microsoft.com/office/drawing/2014/main" id="{CA74D46F-8508-421B-89DB-07D573ACA511}"/>
               </a:ext>
             </a:extLst>
           </p:cNvPr>
@@ -6617,7 +6617,7 @@
     </p:spTree>
     <p:extLst>
       <p:ext uri="{BB962C8B-B14F-4D97-AF65-F5344CB8AC3E}">
-        <p14:creationId xmlns:p14="http://schemas.microsoft.com/office/powerpoint/2010/main" val="1555088369"/>
+        <p14:creationId xmlns:p14="http://schemas.microsoft.com/office/powerpoint/2010/main" val="691667949"/>
       </p:ext>
     </p:extLst>
   </p:cSld>
@@ -6818,7 +6818,7 @@
           <p:cNvPr id="16" name="">
             <a:extLst xmlns:a="http://schemas.openxmlformats.org/drawingml/2006/main">
               <a:ext uri="{FF2B5EF4-FFF2-40B4-BE49-F238E27FC236}">
-                <a16:creationId xmlns:a16="http://schemas.microsoft.com/office/drawing/2014/main" id="{17CA7E0C-E14C-4938-801F-ECD89135A883}"/>
+                <a16:creationId xmlns:a16="http://schemas.microsoft.com/office/drawing/2014/main" id="{EAEFF2F7-F2D4-43C5-A7F2-AF06F6D0F592}"/>
               </a:ext>
             </a:extLst>
           </p:cNvPr>
@@ -6850,7 +6850,7 @@
           <p:cNvPr id="2" name="">
             <a:extLst xmlns:a="http://schemas.openxmlformats.org/drawingml/2006/main">
               <a:ext uri="{FF2B5EF4-FFF2-40B4-BE49-F238E27FC236}">
-                <a16:creationId xmlns:a16="http://schemas.microsoft.com/office/drawing/2014/main" id="{0C5533D3-63E3-42BD-8A75-B44BE8EBFA02}"/>
+                <a16:creationId xmlns:a16="http://schemas.microsoft.com/office/drawing/2014/main" id="{A9DF4692-75E3-4CEE-80AB-74D7A80F7193}"/>
               </a:ext>
             </a:extLst>
           </p:cNvPr>
@@ -6907,7 +6907,7 @@
           <p:cNvPr id="3" name="">
             <a:extLst xmlns:a="http://schemas.openxmlformats.org/drawingml/2006/main">
               <a:ext uri="{FF2B5EF4-FFF2-40B4-BE49-F238E27FC236}">
-                <a16:creationId xmlns:a16="http://schemas.microsoft.com/office/drawing/2014/main" id="{65056306-3D15-4809-A422-0F77BB2151B5}"/>
+                <a16:creationId xmlns:a16="http://schemas.microsoft.com/office/drawing/2014/main" id="{48F44897-9111-417E-B50F-F82EAF3E2DD0}"/>
               </a:ext>
             </a:extLst>
           </p:cNvPr>
@@ -6939,7 +6939,7 @@
           <p:cNvPr id="4" name="">
             <a:extLst xmlns:a="http://schemas.openxmlformats.org/drawingml/2006/main">
               <a:ext uri="{FF2B5EF4-FFF2-40B4-BE49-F238E27FC236}">
-                <a16:creationId xmlns:a16="http://schemas.microsoft.com/office/drawing/2014/main" id="{C45B1345-C345-4684-B720-4A2C1B78F12A}"/>
+                <a16:creationId xmlns:a16="http://schemas.microsoft.com/office/drawing/2014/main" id="{CC7CB97A-10F9-4535-9E50-8BEC638010B0}"/>
               </a:ext>
             </a:extLst>
           </p:cNvPr>
@@ -6996,7 +6996,7 @@
           <p:cNvPr id="5" name="">
             <a:extLst xmlns:a="http://schemas.openxmlformats.org/drawingml/2006/main">
               <a:ext uri="{FF2B5EF4-FFF2-40B4-BE49-F238E27FC236}">
-                <a16:creationId xmlns:a16="http://schemas.microsoft.com/office/drawing/2014/main" id="{89290FB2-75BB-49A6-B815-6BDDC3A99AF8}"/>
+                <a16:creationId xmlns:a16="http://schemas.microsoft.com/office/drawing/2014/main" id="{0F1F75FA-8AF7-4EAD-9C75-A8CC056708E8}"/>
               </a:ext>
             </a:extLst>
           </p:cNvPr>
@@ -7053,7 +7053,7 @@
           <p:cNvPr id="6" name="">
             <a:extLst xmlns:a="http://schemas.openxmlformats.org/drawingml/2006/main">
               <a:ext uri="{FF2B5EF4-FFF2-40B4-BE49-F238E27FC236}">
-                <a16:creationId xmlns:a16="http://schemas.microsoft.com/office/drawing/2014/main" id="{4B9D3BBA-3AB5-4D60-AA56-A53D13B994F0}"/>
+                <a16:creationId xmlns:a16="http://schemas.microsoft.com/office/drawing/2014/main" id="{5CCCCC56-D53B-4B2A-A988-2F9554F79E35}"/>
               </a:ext>
             </a:extLst>
           </p:cNvPr>
@@ -7110,7 +7110,7 @@
           <p:cNvPr id="7" name="">
             <a:extLst xmlns:a="http://schemas.openxmlformats.org/drawingml/2006/main">
               <a:ext uri="{FF2B5EF4-FFF2-40B4-BE49-F238E27FC236}">
-                <a16:creationId xmlns:a16="http://schemas.microsoft.com/office/drawing/2014/main" id="{BA85B3D9-7FBB-43A5-A376-A3C68FC34C42}"/>
+                <a16:creationId xmlns:a16="http://schemas.microsoft.com/office/drawing/2014/main" id="{E253230C-C5F8-4BAC-BA54-5AB5C7C7F724}"/>
               </a:ext>
             </a:extLst>
           </p:cNvPr>
@@ -7142,7 +7142,7 @@
           <p:cNvPr id="8" name="">
             <a:extLst xmlns:a="http://schemas.openxmlformats.org/drawingml/2006/main">
               <a:ext uri="{FF2B5EF4-FFF2-40B4-BE49-F238E27FC236}">
-                <a16:creationId xmlns:a16="http://schemas.microsoft.com/office/drawing/2014/main" id="{282506D0-1A95-421D-A0B7-0CCEF59793DC}"/>
+                <a16:creationId xmlns:a16="http://schemas.microsoft.com/office/drawing/2014/main" id="{0F9414A5-9222-48B9-8D5F-4242E11E0C3E}"/>
               </a:ext>
             </a:extLst>
           </p:cNvPr>
@@ -7199,7 +7199,7 @@
           <p:cNvPr id="9" name="">
             <a:extLst xmlns:a="http://schemas.openxmlformats.org/drawingml/2006/main">
               <a:ext uri="{FF2B5EF4-FFF2-40B4-BE49-F238E27FC236}">
-                <a16:creationId xmlns:a16="http://schemas.microsoft.com/office/drawing/2014/main" id="{08906B2F-C020-4294-8C60-C95E5E3F55E8}"/>
+                <a16:creationId xmlns:a16="http://schemas.microsoft.com/office/drawing/2014/main" id="{96CBAA64-23B5-400E-AA60-E483E6ABDEC8}"/>
               </a:ext>
             </a:extLst>
           </p:cNvPr>
@@ -7256,7 +7256,7 @@
           <p:cNvPr id="10" name="">
             <a:extLst xmlns:a="http://schemas.openxmlformats.org/drawingml/2006/main">
               <a:ext uri="{FF2B5EF4-FFF2-40B4-BE49-F238E27FC236}">
-                <a16:creationId xmlns:a16="http://schemas.microsoft.com/office/drawing/2014/main" id="{4D0CC4F0-7F27-4869-B7B0-BB60B18A476A}"/>
+                <a16:creationId xmlns:a16="http://schemas.microsoft.com/office/drawing/2014/main" id="{5C0B6BB5-9A44-4388-9840-7B961A01F813}"/>
               </a:ext>
             </a:extLst>
           </p:cNvPr>
@@ -7313,7 +7313,7 @@
           <p:cNvPr id="11" name="">
             <a:extLst xmlns:a="http://schemas.openxmlformats.org/drawingml/2006/main">
               <a:ext uri="{FF2B5EF4-FFF2-40B4-BE49-F238E27FC236}">
-                <a16:creationId xmlns:a16="http://schemas.microsoft.com/office/drawing/2014/main" id="{D571CB85-A0A8-42C3-9740-E8A1F9712E05}"/>
+                <a16:creationId xmlns:a16="http://schemas.microsoft.com/office/drawing/2014/main" id="{B78B9F82-E165-4256-AFD6-DE2DE8BF5A63}"/>
               </a:ext>
             </a:extLst>
           </p:cNvPr>
@@ -7345,7 +7345,7 @@
           <p:cNvPr id="12" name="">
             <a:extLst xmlns:a="http://schemas.openxmlformats.org/drawingml/2006/main">
               <a:ext uri="{FF2B5EF4-FFF2-40B4-BE49-F238E27FC236}">
-                <a16:creationId xmlns:a16="http://schemas.microsoft.com/office/drawing/2014/main" id="{F2960036-8ADA-4FDE-B075-0EB61D86DD6A}"/>
+                <a16:creationId xmlns:a16="http://schemas.microsoft.com/office/drawing/2014/main" id="{BF93F3EE-05D1-43A1-9E04-0BD906DC3F7A}"/>
               </a:ext>
             </a:extLst>
           </p:cNvPr>
@@ -7402,7 +7402,7 @@
           <p:cNvPr id="13" name="">
             <a:extLst xmlns:a="http://schemas.openxmlformats.org/drawingml/2006/main">
               <a:ext uri="{FF2B5EF4-FFF2-40B4-BE49-F238E27FC236}">
-                <a16:creationId xmlns:a16="http://schemas.microsoft.com/office/drawing/2014/main" id="{79DDC289-A4DF-42DD-B5B4-D1DF99939A18}"/>
+                <a16:creationId xmlns:a16="http://schemas.microsoft.com/office/drawing/2014/main" id="{8A0F7748-F00F-46A7-A87E-C3981034634F}"/>
               </a:ext>
             </a:extLst>
           </p:cNvPr>
@@ -7459,7 +7459,7 @@
           <p:cNvPr id="14" name="">
             <a:extLst xmlns:a="http://schemas.openxmlformats.org/drawingml/2006/main">
               <a:ext uri="{FF2B5EF4-FFF2-40B4-BE49-F238E27FC236}">
-                <a16:creationId xmlns:a16="http://schemas.microsoft.com/office/drawing/2014/main" id="{43BB15A0-8831-4C0D-8AC6-55B7A72F6E43}"/>
+                <a16:creationId xmlns:a16="http://schemas.microsoft.com/office/drawing/2014/main" id="{20697652-1961-439A-9D2A-C074276BBB98}"/>
               </a:ext>
             </a:extLst>
           </p:cNvPr>
@@ -7516,7 +7516,7 @@
           <p:cNvPr id="15" name="">
             <a:extLst xmlns:a="http://schemas.openxmlformats.org/drawingml/2006/main">
               <a:ext uri="{FF2B5EF4-FFF2-40B4-BE49-F238E27FC236}">
-                <a16:creationId xmlns:a16="http://schemas.microsoft.com/office/drawing/2014/main" id="{C7FC21BB-11EF-43F9-A39F-00366EA6B93D}"/>
+                <a16:creationId xmlns:a16="http://schemas.microsoft.com/office/drawing/2014/main" id="{63268431-419A-4426-B230-004EB970D6F3}"/>
               </a:ext>
             </a:extLst>
           </p:cNvPr>
@@ -7571,7 +7571,7 @@
     </p:spTree>
     <p:extLst>
       <p:ext uri="{BB962C8B-B14F-4D97-AF65-F5344CB8AC3E}">
-        <p14:creationId xmlns:p14="http://schemas.microsoft.com/office/powerpoint/2010/main" val="1221422181"/>
+        <p14:creationId xmlns:p14="http://schemas.microsoft.com/office/powerpoint/2010/main" val="2072574475"/>
       </p:ext>
     </p:extLst>
   </p:cSld>
@@ -7772,7 +7772,7 @@
           <p:cNvPr id="23" name="">
             <a:extLst xmlns:a="http://schemas.openxmlformats.org/drawingml/2006/main">
               <a:ext uri="{FF2B5EF4-FFF2-40B4-BE49-F238E27FC236}">
-                <a16:creationId xmlns:a16="http://schemas.microsoft.com/office/drawing/2014/main" id="{5B718901-A312-450B-A90F-F59809F63621}"/>
+                <a16:creationId xmlns:a16="http://schemas.microsoft.com/office/drawing/2014/main" id="{E7BBB821-5FAF-489D-A006-2E64144B6848}"/>
               </a:ext>
             </a:extLst>
           </p:cNvPr>
@@ -7804,7 +7804,7 @@
           <p:cNvPr id="2" name="">
             <a:extLst xmlns:a="http://schemas.openxmlformats.org/drawingml/2006/main">
               <a:ext uri="{FF2B5EF4-FFF2-40B4-BE49-F238E27FC236}">
-                <a16:creationId xmlns:a16="http://schemas.microsoft.com/office/drawing/2014/main" id="{7A21C537-19A5-4E49-A3FC-BE4A7E4A43E4}"/>
+                <a16:creationId xmlns:a16="http://schemas.microsoft.com/office/drawing/2014/main" id="{18F359AE-DFEB-4FB6-A2CE-BB77CC233726}"/>
               </a:ext>
             </a:extLst>
           </p:cNvPr>
@@ -7861,7 +7861,7 @@
           <p:cNvPr id="3" name="">
             <a:extLst xmlns:a="http://schemas.openxmlformats.org/drawingml/2006/main">
               <a:ext uri="{FF2B5EF4-FFF2-40B4-BE49-F238E27FC236}">
-                <a16:creationId xmlns:a16="http://schemas.microsoft.com/office/drawing/2014/main" id="{E4A8C8D2-E8D7-4577-8E46-C1025ACFDC64}"/>
+                <a16:creationId xmlns:a16="http://schemas.microsoft.com/office/drawing/2014/main" id="{2B9E7544-C9DD-477B-B737-374DDFEDF7A6}"/>
               </a:ext>
             </a:extLst>
           </p:cNvPr>
@@ -7893,7 +7893,7 @@
           <p:cNvPr id="4" name="">
             <a:extLst xmlns:a="http://schemas.openxmlformats.org/drawingml/2006/main">
               <a:ext uri="{FF2B5EF4-FFF2-40B4-BE49-F238E27FC236}">
-                <a16:creationId xmlns:a16="http://schemas.microsoft.com/office/drawing/2014/main" id="{85CCC983-3EEC-4969-91E2-8F1373F90CD3}"/>
+                <a16:creationId xmlns:a16="http://schemas.microsoft.com/office/drawing/2014/main" id="{773D3675-B220-47F6-B43C-C0223FD7CFF2}"/>
               </a:ext>
             </a:extLst>
           </p:cNvPr>
@@ -7950,7 +7950,7 @@
           <p:cNvPr id="5" name="">
             <a:extLst xmlns:a="http://schemas.openxmlformats.org/drawingml/2006/main">
               <a:ext uri="{FF2B5EF4-FFF2-40B4-BE49-F238E27FC236}">
-                <a16:creationId xmlns:a16="http://schemas.microsoft.com/office/drawing/2014/main" id="{946C7161-29AB-428B-9859-8D4DCE1F5F00}"/>
+                <a16:creationId xmlns:a16="http://schemas.microsoft.com/office/drawing/2014/main" id="{60F6461B-CA0E-499A-B278-833AA88E2389}"/>
               </a:ext>
             </a:extLst>
           </p:cNvPr>
@@ -8007,7 +8007,7 @@
           <p:cNvPr id="6" name="">
             <a:extLst xmlns:a="http://schemas.openxmlformats.org/drawingml/2006/main">
               <a:ext uri="{FF2B5EF4-FFF2-40B4-BE49-F238E27FC236}">
-                <a16:creationId xmlns:a16="http://schemas.microsoft.com/office/drawing/2014/main" id="{1B1AE842-F99C-43E8-8825-E3F9F63927CB}"/>
+                <a16:creationId xmlns:a16="http://schemas.microsoft.com/office/drawing/2014/main" id="{1517D31F-A0F2-4A55-9850-35F6A4824AFD}"/>
               </a:ext>
             </a:extLst>
           </p:cNvPr>
@@ -8064,7 +8064,7 @@
           <p:cNvPr id="7" name="">
             <a:extLst xmlns:a="http://schemas.openxmlformats.org/drawingml/2006/main">
               <a:ext uri="{FF2B5EF4-FFF2-40B4-BE49-F238E27FC236}">
-                <a16:creationId xmlns:a16="http://schemas.microsoft.com/office/drawing/2014/main" id="{687FB99C-1DA8-4F29-A360-3E4A591B87B0}"/>
+                <a16:creationId xmlns:a16="http://schemas.microsoft.com/office/drawing/2014/main" id="{3D05552A-2A0E-42A6-8E4F-1E11FF0CB4BA}"/>
               </a:ext>
             </a:extLst>
           </p:cNvPr>
@@ -8096,7 +8096,7 @@
           <p:cNvPr id="8" name="">
             <a:extLst xmlns:a="http://schemas.openxmlformats.org/drawingml/2006/main">
               <a:ext uri="{FF2B5EF4-FFF2-40B4-BE49-F238E27FC236}">
-                <a16:creationId xmlns:a16="http://schemas.microsoft.com/office/drawing/2014/main" id="{1C2A31FA-C12B-4FD1-8139-18A75C241132}"/>
+                <a16:creationId xmlns:a16="http://schemas.microsoft.com/office/drawing/2014/main" id="{28BF6735-2992-4208-8E30-85EBC460FE1A}"/>
               </a:ext>
             </a:extLst>
           </p:cNvPr>
@@ -8153,7 +8153,7 @@
           <p:cNvPr id="9" name="">
             <a:extLst xmlns:a="http://schemas.openxmlformats.org/drawingml/2006/main">
               <a:ext uri="{FF2B5EF4-FFF2-40B4-BE49-F238E27FC236}">
-                <a16:creationId xmlns:a16="http://schemas.microsoft.com/office/drawing/2014/main" id="{3B326183-1FB6-41FB-BAC3-92A53289190A}"/>
+                <a16:creationId xmlns:a16="http://schemas.microsoft.com/office/drawing/2014/main" id="{7A61D0DB-8295-4F3D-BFD2-0087CCD8367D}"/>
               </a:ext>
             </a:extLst>
           </p:cNvPr>
@@ -8210,19 +8210,19 @@
           <p:cNvPr id="10" name="">
             <a:extLst xmlns:a="http://schemas.openxmlformats.org/drawingml/2006/main">
               <a:ext uri="{FF2B5EF4-FFF2-40B4-BE49-F238E27FC236}">
-                <a16:creationId xmlns:a16="http://schemas.microsoft.com/office/drawing/2014/main" id="{2BCF15E9-DFE0-4094-B7C2-154351FAB71A}"/>
-              </a:ext>
-            </a:extLst>
-          </p:cNvPr>
-          <p:cNvSpPr>
-            <a:spLocks xmlns:a="http://schemas.openxmlformats.org/drawingml/2006/main" noGrp="1"/>
-          </p:cNvSpPr>
-          <p:nvPr/>
-        </p:nvSpPr>
-        <p:spPr>
-          <a:xfrm xmlns:a="http://schemas.openxmlformats.org/drawingml/2006/main">
-            <a:off x="914400" y="1257300"/>
-            <a:ext cx="10363200" cy="781050"/>
+                <a16:creationId xmlns:a16="http://schemas.microsoft.com/office/drawing/2014/main" id="{CD53EA3C-3354-418C-9E1D-9FA22D5AAB50}"/>
+              </a:ext>
+            </a:extLst>
+          </p:cNvPr>
+          <p:cNvSpPr>
+            <a:spLocks xmlns:a="http://schemas.openxmlformats.org/drawingml/2006/main" noGrp="1"/>
+          </p:cNvSpPr>
+          <p:nvPr/>
+        </p:nvSpPr>
+        <p:spPr>
+          <a:xfrm xmlns:a="http://schemas.openxmlformats.org/drawingml/2006/main">
+            <a:off x="857250" y="1219200"/>
+            <a:ext cx="10477500" cy="742950"/>
           </a:xfrm>
           <a:prstGeom xmlns:a="http://schemas.openxmlformats.org/drawingml/2006/main" prst="rect">
             <a:avLst/>
@@ -8239,7 +8239,7 @@
           <a:lstStyle xmlns:a="http://schemas.openxmlformats.org/drawingml/2006/main"/>
           <a:p xmlns:a="http://schemas.openxmlformats.org/drawingml/2006/main">
             <a:pPr algn="ctr">
-              <a:defRPr sz="2175" b="1">
+              <a:defRPr sz="2100" b="1">
                 <a:solidFill>
                   <a:srgbClr val="17253A"/>
                 </a:solidFill>
@@ -8249,7 +8249,7 @@
               </a:defRPr>
             </a:pPr>
             <a:r>
-              <a:rPr sz="2175" b="1">
+              <a:rPr sz="2100" b="1">
                 <a:solidFill>
                   <a:srgbClr val="17253A"/>
                 </a:solidFill>
@@ -8267,28 +8267,30 @@
           <p:cNvPr id="11" name="">
             <a:extLst xmlns:a="http://schemas.openxmlformats.org/drawingml/2006/main">
               <a:ext uri="{FF2B5EF4-FFF2-40B4-BE49-F238E27FC236}">
-                <a16:creationId xmlns:a16="http://schemas.microsoft.com/office/drawing/2014/main" id="{FF551261-139E-4CCA-B38D-96AADCE577CD}"/>
-              </a:ext>
-            </a:extLst>
-          </p:cNvPr>
-          <p:cNvSpPr>
-            <a:spLocks xmlns:a="http://schemas.openxmlformats.org/drawingml/2006/main" noGrp="1"/>
-          </p:cNvSpPr>
-          <p:nvPr/>
-        </p:nvSpPr>
-        <p:spPr>
-          <a:xfrm xmlns:a="http://schemas.openxmlformats.org/drawingml/2006/main">
-            <a:off x="1000125" y="2247900"/>
-            <a:ext cx="476250" cy="476250"/>
-          </a:xfrm>
-          <a:prstGeom xmlns:a="http://schemas.openxmlformats.org/drawingml/2006/main" prst="ellipse">
+                <a16:creationId xmlns:a16="http://schemas.microsoft.com/office/drawing/2014/main" id="{1CF993D0-64CE-4E3D-88A5-A1A039D4070B}"/>
+              </a:ext>
+            </a:extLst>
+          </p:cNvPr>
+          <p:cNvSpPr>
+            <a:spLocks xmlns:a="http://schemas.openxmlformats.org/drawingml/2006/main" noGrp="1"/>
+          </p:cNvSpPr>
+          <p:nvPr/>
+        </p:nvSpPr>
+        <p:spPr>
+          <a:xfrm xmlns:a="http://schemas.openxmlformats.org/drawingml/2006/main">
+            <a:off x="971550" y="2124075"/>
+            <a:ext cx="38100" cy="3524250"/>
+          </a:xfrm>
+          <a:prstGeom xmlns:a="http://schemas.openxmlformats.org/drawingml/2006/main" prst="rect">
             <a:avLst/>
           </a:prstGeom>
           <a:solidFill xmlns:a="http://schemas.openxmlformats.org/drawingml/2006/main">
-            <a:srgbClr val="18324A"/>
+            <a:srgbClr val="2C6E73"/>
           </a:solidFill>
           <a:ln xmlns:a="http://schemas.openxmlformats.org/drawingml/2006/main" w="0">
-            <a:noFill/>
+            <a:solidFill>
+              <a:srgbClr val="2C6E73"/>
+            </a:solidFill>
           </a:ln>
         </p:spPr>
       </p:sp>
@@ -8297,19 +8299,19 @@
           <p:cNvPr id="12" name="">
             <a:extLst xmlns:a="http://schemas.openxmlformats.org/drawingml/2006/main">
               <a:ext uri="{FF2B5EF4-FFF2-40B4-BE49-F238E27FC236}">
-                <a16:creationId xmlns:a16="http://schemas.microsoft.com/office/drawing/2014/main" id="{1A8FF487-DCA6-4C04-B8D8-BC18744D8F36}"/>
-              </a:ext>
-            </a:extLst>
-          </p:cNvPr>
-          <p:cNvSpPr>
-            <a:spLocks xmlns:a="http://schemas.openxmlformats.org/drawingml/2006/main" noGrp="1"/>
-          </p:cNvSpPr>
-          <p:nvPr/>
-        </p:nvSpPr>
-        <p:spPr>
-          <a:xfrm xmlns:a="http://schemas.openxmlformats.org/drawingml/2006/main">
-            <a:off x="1000125" y="2276475"/>
-            <a:ext cx="476250" cy="419100"/>
+                <a16:creationId xmlns:a16="http://schemas.microsoft.com/office/drawing/2014/main" id="{0EEC9062-FB4D-45A9-97C1-FAE2104DEE13}"/>
+              </a:ext>
+            </a:extLst>
+          </p:cNvPr>
+          <p:cNvSpPr>
+            <a:spLocks xmlns:a="http://schemas.openxmlformats.org/drawingml/2006/main" noGrp="1"/>
+          </p:cNvSpPr>
+          <p:nvPr/>
+        </p:nvSpPr>
+        <p:spPr>
+          <a:xfrm xmlns:a="http://schemas.openxmlformats.org/drawingml/2006/main">
+            <a:off x="1162050" y="2200275"/>
+            <a:ext cx="400050" cy="400050"/>
           </a:xfrm>
           <a:prstGeom xmlns:a="http://schemas.openxmlformats.org/drawingml/2006/main" prst="rect">
             <a:avLst/>
@@ -8326,9 +8328,9 @@
           <a:lstStyle xmlns:a="http://schemas.openxmlformats.org/drawingml/2006/main"/>
           <a:p xmlns:a="http://schemas.openxmlformats.org/drawingml/2006/main">
             <a:pPr algn="ctr">
-              <a:defRPr sz="1350" b="1">
-                <a:solidFill>
-                  <a:srgbClr val="FFFFFF"/>
+              <a:defRPr sz="1125" b="1">
+                <a:solidFill>
+                  <a:srgbClr val="2C6E73"/>
                 </a:solidFill>
                 <a:latin typeface="Arial"/>
                 <a:ea typeface="Arial"/>
@@ -8336,9 +8338,9 @@
               </a:defRPr>
             </a:pPr>
             <a:r>
-              <a:rPr sz="1350" b="1">
-                <a:solidFill>
-                  <a:srgbClr val="FFFFFF"/>
+              <a:rPr sz="1125" b="1">
+                <a:solidFill>
+                  <a:srgbClr val="2C6E73"/>
                 </a:solidFill>
                 <a:latin typeface="Arial"/>
                 <a:ea typeface="Arial"/>
@@ -8354,19 +8356,19 @@
           <p:cNvPr id="13" name="">
             <a:extLst xmlns:a="http://schemas.openxmlformats.org/drawingml/2006/main">
               <a:ext uri="{FF2B5EF4-FFF2-40B4-BE49-F238E27FC236}">
-                <a16:creationId xmlns:a16="http://schemas.microsoft.com/office/drawing/2014/main" id="{771C7534-63D8-4846-9A15-75EC4F487EF0}"/>
-              </a:ext>
-            </a:extLst>
-          </p:cNvPr>
-          <p:cNvSpPr>
-            <a:spLocks xmlns:a="http://schemas.openxmlformats.org/drawingml/2006/main" noGrp="1"/>
-          </p:cNvSpPr>
-          <p:nvPr/>
-        </p:nvSpPr>
-        <p:spPr>
-          <a:xfrm xmlns:a="http://schemas.openxmlformats.org/drawingml/2006/main">
-            <a:off x="1714500" y="2181225"/>
-            <a:ext cx="9429750" cy="609600"/>
+                <a16:creationId xmlns:a16="http://schemas.microsoft.com/office/drawing/2014/main" id="{49A67826-C1C0-418D-A5DA-68279BF6BD4B}"/>
+              </a:ext>
+            </a:extLst>
+          </p:cNvPr>
+          <p:cNvSpPr>
+            <a:spLocks xmlns:a="http://schemas.openxmlformats.org/drawingml/2006/main" noGrp="1"/>
+          </p:cNvSpPr>
+          <p:nvPr/>
+        </p:nvSpPr>
+        <p:spPr>
+          <a:xfrm xmlns:a="http://schemas.openxmlformats.org/drawingml/2006/main">
+            <a:off x="1714500" y="2114550"/>
+            <a:ext cx="9525000" cy="809625"/>
           </a:xfrm>
           <a:prstGeom xmlns:a="http://schemas.openxmlformats.org/drawingml/2006/main" prst="rect">
             <a:avLst/>
@@ -8383,7 +8385,7 @@
           <a:lstStyle xmlns:a="http://schemas.openxmlformats.org/drawingml/2006/main"/>
           <a:p xmlns:a="http://schemas.openxmlformats.org/drawingml/2006/main">
             <a:pPr algn="l">
-              <a:defRPr sz="1500" b="0">
+              <a:defRPr sz="1725" b="0">
                 <a:solidFill>
                   <a:srgbClr val="17253A"/>
                 </a:solidFill>
@@ -8393,7 +8395,7 @@
               </a:defRPr>
             </a:pPr>
             <a:r>
-              <a:rPr sz="1500" b="0">
+              <a:rPr sz="1725" b="0">
                 <a:solidFill>
                   <a:srgbClr val="17253A"/>
                 </a:solidFill>
@@ -8401,7 +8403,7 @@
                 <a:ea typeface="Arial"/>
                 <a:cs typeface="Arial"/>
               </a:rPr>
-              <a:t>Identify the structure: Find a common denominator before combining fractions.</a:t>
+              <a:t>2 1/3 + 1 5/6</a:t>
             </a:r>
           </a:p>
         </p:txBody>
@@ -8411,28 +8413,30 @@
           <p:cNvPr id="14" name="">
             <a:extLst xmlns:a="http://schemas.openxmlformats.org/drawingml/2006/main">
               <a:ext uri="{FF2B5EF4-FFF2-40B4-BE49-F238E27FC236}">
-                <a16:creationId xmlns:a16="http://schemas.microsoft.com/office/drawing/2014/main" id="{BF004110-E57D-42A6-ADAC-A268FE988180}"/>
-              </a:ext>
-            </a:extLst>
-          </p:cNvPr>
-          <p:cNvSpPr>
-            <a:spLocks xmlns:a="http://schemas.openxmlformats.org/drawingml/2006/main" noGrp="1"/>
-          </p:cNvSpPr>
-          <p:nvPr/>
-        </p:nvSpPr>
-        <p:spPr>
-          <a:xfrm xmlns:a="http://schemas.openxmlformats.org/drawingml/2006/main">
-            <a:off x="1000125" y="2990850"/>
-            <a:ext cx="476250" cy="476250"/>
-          </a:xfrm>
-          <a:prstGeom xmlns:a="http://schemas.openxmlformats.org/drawingml/2006/main" prst="ellipse">
+                <a16:creationId xmlns:a16="http://schemas.microsoft.com/office/drawing/2014/main" id="{DFDB5D8F-C433-4383-B48E-69017E97987E}"/>
+              </a:ext>
+            </a:extLst>
+          </p:cNvPr>
+          <p:cNvSpPr>
+            <a:spLocks xmlns:a="http://schemas.openxmlformats.org/drawingml/2006/main" noGrp="1"/>
+          </p:cNvSpPr>
+          <p:nvPr/>
+        </p:nvSpPr>
+        <p:spPr>
+          <a:xfrm xmlns:a="http://schemas.openxmlformats.org/drawingml/2006/main">
+            <a:off x="1714500" y="2943225"/>
+            <a:ext cx="9334500" cy="9525"/>
+          </a:xfrm>
+          <a:prstGeom xmlns:a="http://schemas.openxmlformats.org/drawingml/2006/main" prst="rect">
             <a:avLst/>
           </a:prstGeom>
           <a:solidFill xmlns:a="http://schemas.openxmlformats.org/drawingml/2006/main">
-            <a:srgbClr val="2C6E73"/>
+            <a:srgbClr val="D9E0E6"/>
           </a:solidFill>
           <a:ln xmlns:a="http://schemas.openxmlformats.org/drawingml/2006/main" w="0">
-            <a:noFill/>
+            <a:solidFill>
+              <a:srgbClr val="D9E0E6"/>
+            </a:solidFill>
           </a:ln>
         </p:spPr>
       </p:sp>
@@ -8441,19 +8445,19 @@
           <p:cNvPr id="15" name="">
             <a:extLst xmlns:a="http://schemas.openxmlformats.org/drawingml/2006/main">
               <a:ext uri="{FF2B5EF4-FFF2-40B4-BE49-F238E27FC236}">
-                <a16:creationId xmlns:a16="http://schemas.microsoft.com/office/drawing/2014/main" id="{17637942-13E2-4001-BF69-B3036A528564}"/>
-              </a:ext>
-            </a:extLst>
-          </p:cNvPr>
-          <p:cNvSpPr>
-            <a:spLocks xmlns:a="http://schemas.openxmlformats.org/drawingml/2006/main" noGrp="1"/>
-          </p:cNvSpPr>
-          <p:nvPr/>
-        </p:nvSpPr>
-        <p:spPr>
-          <a:xfrm xmlns:a="http://schemas.openxmlformats.org/drawingml/2006/main">
-            <a:off x="1000125" y="3019425"/>
-            <a:ext cx="476250" cy="419100"/>
+                <a16:creationId xmlns:a16="http://schemas.microsoft.com/office/drawing/2014/main" id="{247CEB2C-9107-4F69-A47E-EB12C0861F7C}"/>
+              </a:ext>
+            </a:extLst>
+          </p:cNvPr>
+          <p:cNvSpPr>
+            <a:spLocks xmlns:a="http://schemas.openxmlformats.org/drawingml/2006/main" noGrp="1"/>
+          </p:cNvSpPr>
+          <p:nvPr/>
+        </p:nvSpPr>
+        <p:spPr>
+          <a:xfrm xmlns:a="http://schemas.openxmlformats.org/drawingml/2006/main">
+            <a:off x="1162050" y="3076575"/>
+            <a:ext cx="400050" cy="400050"/>
           </a:xfrm>
           <a:prstGeom xmlns:a="http://schemas.openxmlformats.org/drawingml/2006/main" prst="rect">
             <a:avLst/>
@@ -8470,9 +8474,9 @@
           <a:lstStyle xmlns:a="http://schemas.openxmlformats.org/drawingml/2006/main"/>
           <a:p xmlns:a="http://schemas.openxmlformats.org/drawingml/2006/main">
             <a:pPr algn="ctr">
-              <a:defRPr sz="1350" b="1">
-                <a:solidFill>
-                  <a:srgbClr val="FFFFFF"/>
+              <a:defRPr sz="1125" b="1">
+                <a:solidFill>
+                  <a:srgbClr val="2C6E73"/>
                 </a:solidFill>
                 <a:latin typeface="Arial"/>
                 <a:ea typeface="Arial"/>
@@ -8480,9 +8484,9 @@
               </a:defRPr>
             </a:pPr>
             <a:r>
-              <a:rPr sz="1350" b="1">
-                <a:solidFill>
-                  <a:srgbClr val="FFFFFF"/>
+              <a:rPr sz="1125" b="1">
+                <a:solidFill>
+                  <a:srgbClr val="2C6E73"/>
                 </a:solidFill>
                 <a:latin typeface="Arial"/>
                 <a:ea typeface="Arial"/>
@@ -8498,19 +8502,19 @@
           <p:cNvPr id="16" name="">
             <a:extLst xmlns:a="http://schemas.openxmlformats.org/drawingml/2006/main">
               <a:ext uri="{FF2B5EF4-FFF2-40B4-BE49-F238E27FC236}">
-                <a16:creationId xmlns:a16="http://schemas.microsoft.com/office/drawing/2014/main" id="{CA6DC6C4-2414-44EF-8C7E-6507C0558525}"/>
-              </a:ext>
-            </a:extLst>
-          </p:cNvPr>
-          <p:cNvSpPr>
-            <a:spLocks xmlns:a="http://schemas.openxmlformats.org/drawingml/2006/main" noGrp="1"/>
-          </p:cNvSpPr>
-          <p:nvPr/>
-        </p:nvSpPr>
-        <p:spPr>
-          <a:xfrm xmlns:a="http://schemas.openxmlformats.org/drawingml/2006/main">
-            <a:off x="1714500" y="2924175"/>
-            <a:ext cx="9429750" cy="609600"/>
+                <a16:creationId xmlns:a16="http://schemas.microsoft.com/office/drawing/2014/main" id="{01F77075-2CC3-4B0D-A26E-A2089CB933FC}"/>
+              </a:ext>
+            </a:extLst>
+          </p:cNvPr>
+          <p:cNvSpPr>
+            <a:spLocks xmlns:a="http://schemas.openxmlformats.org/drawingml/2006/main" noGrp="1"/>
+          </p:cNvSpPr>
+          <p:nvPr/>
+        </p:nvSpPr>
+        <p:spPr>
+          <a:xfrm xmlns:a="http://schemas.openxmlformats.org/drawingml/2006/main">
+            <a:off x="1714500" y="2990850"/>
+            <a:ext cx="9525000" cy="809625"/>
           </a:xfrm>
           <a:prstGeom xmlns:a="http://schemas.openxmlformats.org/drawingml/2006/main" prst="rect">
             <a:avLst/>
@@ -8527,7 +8531,7 @@
           <a:lstStyle xmlns:a="http://schemas.openxmlformats.org/drawingml/2006/main"/>
           <a:p xmlns:a="http://schemas.openxmlformats.org/drawingml/2006/main">
             <a:pPr algn="l">
-              <a:defRPr sz="1500" b="0">
+              <a:defRPr sz="1725" b="0">
                 <a:solidFill>
                   <a:srgbClr val="17253A"/>
                 </a:solidFill>
@@ -8537,7 +8541,7 @@
               </a:defRPr>
             </a:pPr>
             <a:r>
-              <a:rPr sz="1500" b="0">
+              <a:rPr sz="1725" b="0">
                 <a:solidFill>
                   <a:srgbClr val="17253A"/>
                 </a:solidFill>
@@ -8545,7 +8549,7 @@
                 <a:ea typeface="Arial"/>
                 <a:cs typeface="Arial"/>
               </a:rPr>
-              <a:t>Set up the method: Add or subtract the numerators while keeping the denominator.</a:t>
+              <a:t>1/3 = 2/6</a:t>
             </a:r>
           </a:p>
         </p:txBody>
@@ -8555,28 +8559,30 @@
           <p:cNvPr id="17" name="">
             <a:extLst xmlns:a="http://schemas.openxmlformats.org/drawingml/2006/main">
               <a:ext uri="{FF2B5EF4-FFF2-40B4-BE49-F238E27FC236}">
-                <a16:creationId xmlns:a16="http://schemas.microsoft.com/office/drawing/2014/main" id="{40884B7C-B7EB-45C3-B90B-B9919A6E1EED}"/>
-              </a:ext>
-            </a:extLst>
-          </p:cNvPr>
-          <p:cNvSpPr>
-            <a:spLocks xmlns:a="http://schemas.openxmlformats.org/drawingml/2006/main" noGrp="1"/>
-          </p:cNvSpPr>
-          <p:nvPr/>
-        </p:nvSpPr>
-        <p:spPr>
-          <a:xfrm xmlns:a="http://schemas.openxmlformats.org/drawingml/2006/main">
-            <a:off x="1000125" y="3733800"/>
-            <a:ext cx="476250" cy="476250"/>
-          </a:xfrm>
-          <a:prstGeom xmlns:a="http://schemas.openxmlformats.org/drawingml/2006/main" prst="ellipse">
+                <a16:creationId xmlns:a16="http://schemas.microsoft.com/office/drawing/2014/main" id="{54E01B14-1C71-46EA-B3FB-17D625B033C8}"/>
+              </a:ext>
+            </a:extLst>
+          </p:cNvPr>
+          <p:cNvSpPr>
+            <a:spLocks xmlns:a="http://schemas.openxmlformats.org/drawingml/2006/main" noGrp="1"/>
+          </p:cNvSpPr>
+          <p:nvPr/>
+        </p:nvSpPr>
+        <p:spPr>
+          <a:xfrm xmlns:a="http://schemas.openxmlformats.org/drawingml/2006/main">
+            <a:off x="1714500" y="3819525"/>
+            <a:ext cx="9334500" cy="9525"/>
+          </a:xfrm>
+          <a:prstGeom xmlns:a="http://schemas.openxmlformats.org/drawingml/2006/main" prst="rect">
             <a:avLst/>
           </a:prstGeom>
           <a:solidFill xmlns:a="http://schemas.openxmlformats.org/drawingml/2006/main">
-            <a:srgbClr val="2C6E73"/>
+            <a:srgbClr val="D9E0E6"/>
           </a:solidFill>
           <a:ln xmlns:a="http://schemas.openxmlformats.org/drawingml/2006/main" w="0">
-            <a:noFill/>
+            <a:solidFill>
+              <a:srgbClr val="D9E0E6"/>
+            </a:solidFill>
           </a:ln>
         </p:spPr>
       </p:sp>
@@ -8585,19 +8591,19 @@
           <p:cNvPr id="18" name="">
             <a:extLst xmlns:a="http://schemas.openxmlformats.org/drawingml/2006/main">
               <a:ext uri="{FF2B5EF4-FFF2-40B4-BE49-F238E27FC236}">
-                <a16:creationId xmlns:a16="http://schemas.microsoft.com/office/drawing/2014/main" id="{F0E761BD-5AF2-45FE-920A-DCA72CC071DB}"/>
-              </a:ext>
-            </a:extLst>
-          </p:cNvPr>
-          <p:cNvSpPr>
-            <a:spLocks xmlns:a="http://schemas.openxmlformats.org/drawingml/2006/main" noGrp="1"/>
-          </p:cNvSpPr>
-          <p:nvPr/>
-        </p:nvSpPr>
-        <p:spPr>
-          <a:xfrm xmlns:a="http://schemas.openxmlformats.org/drawingml/2006/main">
-            <a:off x="1000125" y="3762375"/>
-            <a:ext cx="476250" cy="419100"/>
+                <a16:creationId xmlns:a16="http://schemas.microsoft.com/office/drawing/2014/main" id="{2BF65E23-CE18-40F8-BC9B-4F64E8A7F595}"/>
+              </a:ext>
+            </a:extLst>
+          </p:cNvPr>
+          <p:cNvSpPr>
+            <a:spLocks xmlns:a="http://schemas.openxmlformats.org/drawingml/2006/main" noGrp="1"/>
+          </p:cNvSpPr>
+          <p:nvPr/>
+        </p:nvSpPr>
+        <p:spPr>
+          <a:xfrm xmlns:a="http://schemas.openxmlformats.org/drawingml/2006/main">
+            <a:off x="1162050" y="3952875"/>
+            <a:ext cx="400050" cy="400050"/>
           </a:xfrm>
           <a:prstGeom xmlns:a="http://schemas.openxmlformats.org/drawingml/2006/main" prst="rect">
             <a:avLst/>
@@ -8614,9 +8620,9 @@
           <a:lstStyle xmlns:a="http://schemas.openxmlformats.org/drawingml/2006/main"/>
           <a:p xmlns:a="http://schemas.openxmlformats.org/drawingml/2006/main">
             <a:pPr algn="ctr">
-              <a:defRPr sz="1350" b="1">
-                <a:solidFill>
-                  <a:srgbClr val="FFFFFF"/>
+              <a:defRPr sz="1125" b="1">
+                <a:solidFill>
+                  <a:srgbClr val="2C6E73"/>
                 </a:solidFill>
                 <a:latin typeface="Arial"/>
                 <a:ea typeface="Arial"/>
@@ -8624,9 +8630,9 @@
               </a:defRPr>
             </a:pPr>
             <a:r>
-              <a:rPr sz="1350" b="1">
-                <a:solidFill>
-                  <a:srgbClr val="FFFFFF"/>
+              <a:rPr sz="1125" b="1">
+                <a:solidFill>
+                  <a:srgbClr val="2C6E73"/>
                 </a:solidFill>
                 <a:latin typeface="Arial"/>
                 <a:ea typeface="Arial"/>
@@ -8642,19 +8648,19 @@
           <p:cNvPr id="19" name="">
             <a:extLst xmlns:a="http://schemas.openxmlformats.org/drawingml/2006/main">
               <a:ext uri="{FF2B5EF4-FFF2-40B4-BE49-F238E27FC236}">
-                <a16:creationId xmlns:a16="http://schemas.microsoft.com/office/drawing/2014/main" id="{D1DD25D9-790B-4F3B-88D7-ACE476842ECF}"/>
-              </a:ext>
-            </a:extLst>
-          </p:cNvPr>
-          <p:cNvSpPr>
-            <a:spLocks xmlns:a="http://schemas.openxmlformats.org/drawingml/2006/main" noGrp="1"/>
-          </p:cNvSpPr>
-          <p:nvPr/>
-        </p:nvSpPr>
-        <p:spPr>
-          <a:xfrm xmlns:a="http://schemas.openxmlformats.org/drawingml/2006/main">
-            <a:off x="1714500" y="3667125"/>
-            <a:ext cx="9429750" cy="609600"/>
+                <a16:creationId xmlns:a16="http://schemas.microsoft.com/office/drawing/2014/main" id="{FE0CBEE7-F25E-466D-8948-3C4B6EE11B89}"/>
+              </a:ext>
+            </a:extLst>
+          </p:cNvPr>
+          <p:cNvSpPr>
+            <a:spLocks xmlns:a="http://schemas.openxmlformats.org/drawingml/2006/main" noGrp="1"/>
+          </p:cNvSpPr>
+          <p:nvPr/>
+        </p:nvSpPr>
+        <p:spPr>
+          <a:xfrm xmlns:a="http://schemas.openxmlformats.org/drawingml/2006/main">
+            <a:off x="1714500" y="3867150"/>
+            <a:ext cx="9525000" cy="809625"/>
           </a:xfrm>
           <a:prstGeom xmlns:a="http://schemas.openxmlformats.org/drawingml/2006/main" prst="rect">
             <a:avLst/>
@@ -8671,7 +8677,7 @@
           <a:lstStyle xmlns:a="http://schemas.openxmlformats.org/drawingml/2006/main"/>
           <a:p xmlns:a="http://schemas.openxmlformats.org/drawingml/2006/main">
             <a:pPr algn="l">
-              <a:defRPr sz="1500" b="0">
+              <a:defRPr sz="1725" b="0">
                 <a:solidFill>
                   <a:srgbClr val="17253A"/>
                 </a:solidFill>
@@ -8681,7 +8687,7 @@
               </a:defRPr>
             </a:pPr>
             <a:r>
-              <a:rPr sz="1500" b="0">
+              <a:rPr sz="1725" b="0">
                 <a:solidFill>
                   <a:srgbClr val="17253A"/>
                 </a:solidFill>
@@ -8689,7 +8695,7 @@
                 <a:ea typeface="Arial"/>
                 <a:cs typeface="Arial"/>
               </a:rPr>
-              <a:t>Complete the calculation: 4 1/6.</a:t>
+              <a:t>2 2/6 + 1 5/6 = 3 7/6</a:t>
             </a:r>
           </a:p>
         </p:txBody>
@@ -8699,28 +8705,30 @@
           <p:cNvPr id="20" name="">
             <a:extLst xmlns:a="http://schemas.openxmlformats.org/drawingml/2006/main">
               <a:ext uri="{FF2B5EF4-FFF2-40B4-BE49-F238E27FC236}">
-                <a16:creationId xmlns:a16="http://schemas.microsoft.com/office/drawing/2014/main" id="{AE178658-67B4-4400-AE49-B64386083838}"/>
-              </a:ext>
-            </a:extLst>
-          </p:cNvPr>
-          <p:cNvSpPr>
-            <a:spLocks xmlns:a="http://schemas.openxmlformats.org/drawingml/2006/main" noGrp="1"/>
-          </p:cNvSpPr>
-          <p:nvPr/>
-        </p:nvSpPr>
-        <p:spPr>
-          <a:xfrm xmlns:a="http://schemas.openxmlformats.org/drawingml/2006/main">
-            <a:off x="1000125" y="4476750"/>
-            <a:ext cx="476250" cy="476250"/>
-          </a:xfrm>
-          <a:prstGeom xmlns:a="http://schemas.openxmlformats.org/drawingml/2006/main" prst="ellipse">
+                <a16:creationId xmlns:a16="http://schemas.microsoft.com/office/drawing/2014/main" id="{70052B21-D7FF-4F32-93D9-AAD3052CA211}"/>
+              </a:ext>
+            </a:extLst>
+          </p:cNvPr>
+          <p:cNvSpPr>
+            <a:spLocks xmlns:a="http://schemas.openxmlformats.org/drawingml/2006/main" noGrp="1"/>
+          </p:cNvSpPr>
+          <p:nvPr/>
+        </p:nvSpPr>
+        <p:spPr>
+          <a:xfrm xmlns:a="http://schemas.openxmlformats.org/drawingml/2006/main">
+            <a:off x="1714500" y="4695825"/>
+            <a:ext cx="9334500" cy="9525"/>
+          </a:xfrm>
+          <a:prstGeom xmlns:a="http://schemas.openxmlformats.org/drawingml/2006/main" prst="rect">
             <a:avLst/>
           </a:prstGeom>
           <a:solidFill xmlns:a="http://schemas.openxmlformats.org/drawingml/2006/main">
-            <a:srgbClr val="2C6E73"/>
+            <a:srgbClr val="D9E0E6"/>
           </a:solidFill>
           <a:ln xmlns:a="http://schemas.openxmlformats.org/drawingml/2006/main" w="0">
-            <a:noFill/>
+            <a:solidFill>
+              <a:srgbClr val="D9E0E6"/>
+            </a:solidFill>
           </a:ln>
         </p:spPr>
       </p:sp>
@@ -8729,19 +8737,19 @@
           <p:cNvPr id="21" name="">
             <a:extLst xmlns:a="http://schemas.openxmlformats.org/drawingml/2006/main">
               <a:ext uri="{FF2B5EF4-FFF2-40B4-BE49-F238E27FC236}">
-                <a16:creationId xmlns:a16="http://schemas.microsoft.com/office/drawing/2014/main" id="{FF6E9D84-EC17-4E16-802F-8BB706D19183}"/>
-              </a:ext>
-            </a:extLst>
-          </p:cNvPr>
-          <p:cNvSpPr>
-            <a:spLocks xmlns:a="http://schemas.openxmlformats.org/drawingml/2006/main" noGrp="1"/>
-          </p:cNvSpPr>
-          <p:nvPr/>
-        </p:nvSpPr>
-        <p:spPr>
-          <a:xfrm xmlns:a="http://schemas.openxmlformats.org/drawingml/2006/main">
-            <a:off x="1000125" y="4505325"/>
-            <a:ext cx="476250" cy="419100"/>
+                <a16:creationId xmlns:a16="http://schemas.microsoft.com/office/drawing/2014/main" id="{6991DAA7-2EED-4C83-A7F8-9F85008E3142}"/>
+              </a:ext>
+            </a:extLst>
+          </p:cNvPr>
+          <p:cNvSpPr>
+            <a:spLocks xmlns:a="http://schemas.openxmlformats.org/drawingml/2006/main" noGrp="1"/>
+          </p:cNvSpPr>
+          <p:nvPr/>
+        </p:nvSpPr>
+        <p:spPr>
+          <a:xfrm xmlns:a="http://schemas.openxmlformats.org/drawingml/2006/main">
+            <a:off x="1162050" y="4829175"/>
+            <a:ext cx="400050" cy="400050"/>
           </a:xfrm>
           <a:prstGeom xmlns:a="http://schemas.openxmlformats.org/drawingml/2006/main" prst="rect">
             <a:avLst/>
@@ -8758,9 +8766,9 @@
           <a:lstStyle xmlns:a="http://schemas.openxmlformats.org/drawingml/2006/main"/>
           <a:p xmlns:a="http://schemas.openxmlformats.org/drawingml/2006/main">
             <a:pPr algn="ctr">
-              <a:defRPr sz="1350" b="1">
-                <a:solidFill>
-                  <a:srgbClr val="FFFFFF"/>
+              <a:defRPr sz="1125" b="1">
+                <a:solidFill>
+                  <a:srgbClr val="2F785D"/>
                 </a:solidFill>
                 <a:latin typeface="Arial"/>
                 <a:ea typeface="Arial"/>
@@ -8768,9 +8776,9 @@
               </a:defRPr>
             </a:pPr>
             <a:r>
-              <a:rPr sz="1350" b="1">
-                <a:solidFill>
-                  <a:srgbClr val="FFFFFF"/>
+              <a:rPr sz="1125" b="1">
+                <a:solidFill>
+                  <a:srgbClr val="2F785D"/>
                 </a:solidFill>
                 <a:latin typeface="Arial"/>
                 <a:ea typeface="Arial"/>
@@ -8786,19 +8794,19 @@
           <p:cNvPr id="22" name="">
             <a:extLst xmlns:a="http://schemas.openxmlformats.org/drawingml/2006/main">
               <a:ext uri="{FF2B5EF4-FFF2-40B4-BE49-F238E27FC236}">
-                <a16:creationId xmlns:a16="http://schemas.microsoft.com/office/drawing/2014/main" id="{13886CD0-0AB9-431B-880B-3A57AADC54F4}"/>
-              </a:ext>
-            </a:extLst>
-          </p:cNvPr>
-          <p:cNvSpPr>
-            <a:spLocks xmlns:a="http://schemas.openxmlformats.org/drawingml/2006/main" noGrp="1"/>
-          </p:cNvSpPr>
-          <p:nvPr/>
-        </p:nvSpPr>
-        <p:spPr>
-          <a:xfrm xmlns:a="http://schemas.openxmlformats.org/drawingml/2006/main">
-            <a:off x="1714500" y="4410075"/>
-            <a:ext cx="9429750" cy="609600"/>
+                <a16:creationId xmlns:a16="http://schemas.microsoft.com/office/drawing/2014/main" id="{64745093-4F49-4CDA-93E3-F28587CF0F60}"/>
+              </a:ext>
+            </a:extLst>
+          </p:cNvPr>
+          <p:cNvSpPr>
+            <a:spLocks xmlns:a="http://schemas.openxmlformats.org/drawingml/2006/main" noGrp="1"/>
+          </p:cNvSpPr>
+          <p:nvPr/>
+        </p:nvSpPr>
+        <p:spPr>
+          <a:xfrm xmlns:a="http://schemas.openxmlformats.org/drawingml/2006/main">
+            <a:off x="1714500" y="4743450"/>
+            <a:ext cx="9525000" cy="809625"/>
           </a:xfrm>
           <a:prstGeom xmlns:a="http://schemas.openxmlformats.org/drawingml/2006/main" prst="rect">
             <a:avLst/>
@@ -8815,7 +8823,7 @@
           <a:lstStyle xmlns:a="http://schemas.openxmlformats.org/drawingml/2006/main"/>
           <a:p xmlns:a="http://schemas.openxmlformats.org/drawingml/2006/main">
             <a:pPr algn="l">
-              <a:defRPr sz="1500" b="1">
+              <a:defRPr sz="1725" b="1">
                 <a:solidFill>
                   <a:srgbClr val="2F785D"/>
                 </a:solidFill>
@@ -8825,7 +8833,7 @@
               </a:defRPr>
             </a:pPr>
             <a:r>
-              <a:rPr sz="1500" b="1">
+              <a:rPr sz="1725" b="1">
                 <a:solidFill>
                   <a:srgbClr val="2F785D"/>
                 </a:solidFill>
@@ -8833,7 +8841,7 @@
                 <a:ea typeface="Arial"/>
                 <a:cs typeface="Arial"/>
               </a:rPr>
-              <a:t>Check the result: Simplify and convert the answer when appropriate.</a:t>
+              <a:t>3 7/6 = 4 1/6</a:t>
             </a:r>
           </a:p>
         </p:txBody>
@@ -8841,7 +8849,7 @@
     </p:spTree>
     <p:extLst>
       <p:ext uri="{BB962C8B-B14F-4D97-AF65-F5344CB8AC3E}">
-        <p14:creationId xmlns:p14="http://schemas.microsoft.com/office/powerpoint/2010/main" val="1348391303"/>
+        <p14:creationId xmlns:p14="http://schemas.microsoft.com/office/powerpoint/2010/main" val="549470180"/>
       </p:ext>
     </p:extLst>
   </p:cSld>
@@ -9134,7 +9142,7 @@
           <p:cNvPr id="15" name="">
             <a:extLst xmlns:a="http://schemas.openxmlformats.org/drawingml/2006/main">
               <a:ext uri="{FF2B5EF4-FFF2-40B4-BE49-F238E27FC236}">
-                <a16:creationId xmlns:a16="http://schemas.microsoft.com/office/drawing/2014/main" id="{C841CAEB-AB6D-469A-88E5-12009EAA75C2}"/>
+                <a16:creationId xmlns:a16="http://schemas.microsoft.com/office/drawing/2014/main" id="{65E1EDBB-1C2E-4ACC-A4B6-C5C9DAF01242}"/>
               </a:ext>
             </a:extLst>
           </p:cNvPr>
@@ -9166,7 +9174,7 @@
           <p:cNvPr id="2" name="">
             <a:extLst xmlns:a="http://schemas.openxmlformats.org/drawingml/2006/main">
               <a:ext uri="{FF2B5EF4-FFF2-40B4-BE49-F238E27FC236}">
-                <a16:creationId xmlns:a16="http://schemas.microsoft.com/office/drawing/2014/main" id="{7B405538-B5A0-49D2-82D3-6D05DDE5B1E7}"/>
+                <a16:creationId xmlns:a16="http://schemas.microsoft.com/office/drawing/2014/main" id="{AADA7972-C17E-49BD-AE59-62CB1F184F4E}"/>
               </a:ext>
             </a:extLst>
           </p:cNvPr>
@@ -9223,7 +9231,7 @@
           <p:cNvPr id="3" name="">
             <a:extLst xmlns:a="http://schemas.openxmlformats.org/drawingml/2006/main">
               <a:ext uri="{FF2B5EF4-FFF2-40B4-BE49-F238E27FC236}">
-                <a16:creationId xmlns:a16="http://schemas.microsoft.com/office/drawing/2014/main" id="{182D9E17-3195-45B2-BF11-A8968473678E}"/>
+                <a16:creationId xmlns:a16="http://schemas.microsoft.com/office/drawing/2014/main" id="{6B86EA02-F65E-4AFB-89C1-234426299C80}"/>
               </a:ext>
             </a:extLst>
           </p:cNvPr>
@@ -9255,7 +9263,7 @@
           <p:cNvPr id="4" name="">
             <a:extLst xmlns:a="http://schemas.openxmlformats.org/drawingml/2006/main">
               <a:ext uri="{FF2B5EF4-FFF2-40B4-BE49-F238E27FC236}">
-                <a16:creationId xmlns:a16="http://schemas.microsoft.com/office/drawing/2014/main" id="{6AAE91F9-D687-4A0A-8569-0AF36761D6A6}"/>
+                <a16:creationId xmlns:a16="http://schemas.microsoft.com/office/drawing/2014/main" id="{002E27DE-56EF-4936-BB6D-B991A4F68EDE}"/>
               </a:ext>
             </a:extLst>
           </p:cNvPr>
@@ -9312,7 +9320,7 @@
           <p:cNvPr id="5" name="">
             <a:extLst xmlns:a="http://schemas.openxmlformats.org/drawingml/2006/main">
               <a:ext uri="{FF2B5EF4-FFF2-40B4-BE49-F238E27FC236}">
-                <a16:creationId xmlns:a16="http://schemas.microsoft.com/office/drawing/2014/main" id="{757375FB-7620-4E1C-97D9-0729A6053008}"/>
+                <a16:creationId xmlns:a16="http://schemas.microsoft.com/office/drawing/2014/main" id="{A3AE4D78-90BE-4966-B22C-AC273C173D0D}"/>
               </a:ext>
             </a:extLst>
           </p:cNvPr>
@@ -9369,7 +9377,7 @@
           <p:cNvPr id="6" name="">
             <a:extLst xmlns:a="http://schemas.openxmlformats.org/drawingml/2006/main">
               <a:ext uri="{FF2B5EF4-FFF2-40B4-BE49-F238E27FC236}">
-                <a16:creationId xmlns:a16="http://schemas.microsoft.com/office/drawing/2014/main" id="{27670D1B-42EF-43AD-8246-C13287D67222}"/>
+                <a16:creationId xmlns:a16="http://schemas.microsoft.com/office/drawing/2014/main" id="{B900A5A0-3363-4C2E-A8DA-7EDEFDE320BA}"/>
               </a:ext>
             </a:extLst>
           </p:cNvPr>
@@ -9426,7 +9434,7 @@
           <p:cNvPr id="7" name="">
             <a:extLst xmlns:a="http://schemas.openxmlformats.org/drawingml/2006/main">
               <a:ext uri="{FF2B5EF4-FFF2-40B4-BE49-F238E27FC236}">
-                <a16:creationId xmlns:a16="http://schemas.microsoft.com/office/drawing/2014/main" id="{78673F1E-8ED3-4B97-A591-F985D841DFF8}"/>
+                <a16:creationId xmlns:a16="http://schemas.microsoft.com/office/drawing/2014/main" id="{F1ED988E-8948-4BCB-9165-978A0B138C7D}"/>
               </a:ext>
             </a:extLst>
           </p:cNvPr>
@@ -9458,7 +9466,7 @@
           <p:cNvPr id="8" name="">
             <a:extLst xmlns:a="http://schemas.openxmlformats.org/drawingml/2006/main">
               <a:ext uri="{FF2B5EF4-FFF2-40B4-BE49-F238E27FC236}">
-                <a16:creationId xmlns:a16="http://schemas.microsoft.com/office/drawing/2014/main" id="{FA7BC347-3D9E-4781-AEA4-945544FF2EE3}"/>
+                <a16:creationId xmlns:a16="http://schemas.microsoft.com/office/drawing/2014/main" id="{E66CE8A7-1A1C-4BF4-952F-4CA8675E6511}"/>
               </a:ext>
             </a:extLst>
           </p:cNvPr>
@@ -9515,7 +9523,7 @@
           <p:cNvPr id="9" name="">
             <a:extLst xmlns:a="http://schemas.openxmlformats.org/drawingml/2006/main">
               <a:ext uri="{FF2B5EF4-FFF2-40B4-BE49-F238E27FC236}">
-                <a16:creationId xmlns:a16="http://schemas.microsoft.com/office/drawing/2014/main" id="{2DEFFB35-82FB-4FC4-9120-1F23EB62C886}"/>
+                <a16:creationId xmlns:a16="http://schemas.microsoft.com/office/drawing/2014/main" id="{F19ECF8A-ACD2-4D5E-AAAF-C79E8BF9520B}"/>
               </a:ext>
             </a:extLst>
           </p:cNvPr>
@@ -9572,7 +9580,7 @@
           <p:cNvPr id="10" name="">
             <a:extLst xmlns:a="http://schemas.openxmlformats.org/drawingml/2006/main">
               <a:ext uri="{FF2B5EF4-FFF2-40B4-BE49-F238E27FC236}">
-                <a16:creationId xmlns:a16="http://schemas.microsoft.com/office/drawing/2014/main" id="{7E109CB1-DA95-4DC4-87E5-1D8D94B2A7E5}"/>
+                <a16:creationId xmlns:a16="http://schemas.microsoft.com/office/drawing/2014/main" id="{2D3B6F34-2F45-4595-BF76-314BAFD23E1A}"/>
               </a:ext>
             </a:extLst>
           </p:cNvPr>
@@ -9629,7 +9637,7 @@
           <p:cNvPr id="11" name="">
             <a:extLst xmlns:a="http://schemas.openxmlformats.org/drawingml/2006/main">
               <a:ext uri="{FF2B5EF4-FFF2-40B4-BE49-F238E27FC236}">
-                <a16:creationId xmlns:a16="http://schemas.microsoft.com/office/drawing/2014/main" id="{D6ECE82C-2698-45B3-8AAB-6A0EFD4082DF}"/>
+                <a16:creationId xmlns:a16="http://schemas.microsoft.com/office/drawing/2014/main" id="{F083F183-6DBC-4E52-A017-00B4B3989423}"/>
               </a:ext>
             </a:extLst>
           </p:cNvPr>
@@ -9686,7 +9694,7 @@
           <p:cNvPr id="12" name="">
             <a:extLst xmlns:a="http://schemas.openxmlformats.org/drawingml/2006/main">
               <a:ext uri="{FF2B5EF4-FFF2-40B4-BE49-F238E27FC236}">
-                <a16:creationId xmlns:a16="http://schemas.microsoft.com/office/drawing/2014/main" id="{92800EA1-19E2-4416-A705-F91B2ACCB24D}"/>
+                <a16:creationId xmlns:a16="http://schemas.microsoft.com/office/drawing/2014/main" id="{FFC1840B-DBE8-414C-99F2-7235641FF872}"/>
               </a:ext>
             </a:extLst>
           </p:cNvPr>
@@ -9718,7 +9726,7 @@
           <p:cNvPr id="13" name="">
             <a:extLst xmlns:a="http://schemas.openxmlformats.org/drawingml/2006/main">
               <a:ext uri="{FF2B5EF4-FFF2-40B4-BE49-F238E27FC236}">
-                <a16:creationId xmlns:a16="http://schemas.microsoft.com/office/drawing/2014/main" id="{27FF73DA-7074-44AB-B883-2020A8739A27}"/>
+                <a16:creationId xmlns:a16="http://schemas.microsoft.com/office/drawing/2014/main" id="{FE10C567-ACDE-41E6-8F2D-D8BEA5FAB54F}"/>
               </a:ext>
             </a:extLst>
           </p:cNvPr>
@@ -9775,7 +9783,7 @@
           <p:cNvPr id="14" name="">
             <a:extLst xmlns:a="http://schemas.openxmlformats.org/drawingml/2006/main">
               <a:ext uri="{FF2B5EF4-FFF2-40B4-BE49-F238E27FC236}">
-                <a16:creationId xmlns:a16="http://schemas.microsoft.com/office/drawing/2014/main" id="{40C16DC5-786F-426B-847E-D177512984DF}"/>
+                <a16:creationId xmlns:a16="http://schemas.microsoft.com/office/drawing/2014/main" id="{121FA3DB-D2FC-4472-9877-082BB3A485D4}"/>
               </a:ext>
             </a:extLst>
           </p:cNvPr>
@@ -9830,7 +9838,7 @@
     </p:spTree>
     <p:extLst>
       <p:ext uri="{BB962C8B-B14F-4D97-AF65-F5344CB8AC3E}">
-        <p14:creationId xmlns:p14="http://schemas.microsoft.com/office/powerpoint/2010/main" val="2109457097"/>
+        <p14:creationId xmlns:p14="http://schemas.microsoft.com/office/powerpoint/2010/main" val="191371168"/>
       </p:ext>
     </p:extLst>
   </p:cSld>
@@ -10031,7 +10039,7 @@
           <p:cNvPr id="16" name="">
             <a:extLst xmlns:a="http://schemas.openxmlformats.org/drawingml/2006/main">
               <a:ext uri="{FF2B5EF4-FFF2-40B4-BE49-F238E27FC236}">
-                <a16:creationId xmlns:a16="http://schemas.microsoft.com/office/drawing/2014/main" id="{B125778F-1411-452C-87B4-F158EF6DF46D}"/>
+                <a16:creationId xmlns:a16="http://schemas.microsoft.com/office/drawing/2014/main" id="{27A57E0B-2071-4C1F-9C8A-714B8C93DAAA}"/>
               </a:ext>
             </a:extLst>
           </p:cNvPr>
@@ -10063,7 +10071,7 @@
           <p:cNvPr id="2" name="">
             <a:extLst xmlns:a="http://schemas.openxmlformats.org/drawingml/2006/main">
               <a:ext uri="{FF2B5EF4-FFF2-40B4-BE49-F238E27FC236}">
-                <a16:creationId xmlns:a16="http://schemas.microsoft.com/office/drawing/2014/main" id="{ACD25E55-9A68-44BD-93A6-778F41B63BD8}"/>
+                <a16:creationId xmlns:a16="http://schemas.microsoft.com/office/drawing/2014/main" id="{E5489D19-BEE1-404C-BB01-8B4F4DDB277E}"/>
               </a:ext>
             </a:extLst>
           </p:cNvPr>
@@ -10120,7 +10128,7 @@
           <p:cNvPr id="3" name="">
             <a:extLst xmlns:a="http://schemas.openxmlformats.org/drawingml/2006/main">
               <a:ext uri="{FF2B5EF4-FFF2-40B4-BE49-F238E27FC236}">
-                <a16:creationId xmlns:a16="http://schemas.microsoft.com/office/drawing/2014/main" id="{15739AD1-D39A-4889-B99F-052770E3BB3B}"/>
+                <a16:creationId xmlns:a16="http://schemas.microsoft.com/office/drawing/2014/main" id="{690694A4-98D4-400C-AD73-BC644A38E510}"/>
               </a:ext>
             </a:extLst>
           </p:cNvPr>
@@ -10152,7 +10160,7 @@
           <p:cNvPr id="4" name="">
             <a:extLst xmlns:a="http://schemas.openxmlformats.org/drawingml/2006/main">
               <a:ext uri="{FF2B5EF4-FFF2-40B4-BE49-F238E27FC236}">
-                <a16:creationId xmlns:a16="http://schemas.microsoft.com/office/drawing/2014/main" id="{06E16136-B366-4228-ACDC-3137E031E80C}"/>
+                <a16:creationId xmlns:a16="http://schemas.microsoft.com/office/drawing/2014/main" id="{2E236A0B-57D3-48DE-AB3D-98FA20F6E818}"/>
               </a:ext>
             </a:extLst>
           </p:cNvPr>
@@ -10209,7 +10217,7 @@
           <p:cNvPr id="5" name="">
             <a:extLst xmlns:a="http://schemas.openxmlformats.org/drawingml/2006/main">
               <a:ext uri="{FF2B5EF4-FFF2-40B4-BE49-F238E27FC236}">
-                <a16:creationId xmlns:a16="http://schemas.microsoft.com/office/drawing/2014/main" id="{C5688A97-1CE5-40F5-B457-3ABFEB2A58EB}"/>
+                <a16:creationId xmlns:a16="http://schemas.microsoft.com/office/drawing/2014/main" id="{919C31B7-AB83-49D2-9759-D17F1640AAA5}"/>
               </a:ext>
             </a:extLst>
           </p:cNvPr>
@@ -10266,7 +10274,7 @@
           <p:cNvPr id="6" name="">
             <a:extLst xmlns:a="http://schemas.openxmlformats.org/drawingml/2006/main">
               <a:ext uri="{FF2B5EF4-FFF2-40B4-BE49-F238E27FC236}">
-                <a16:creationId xmlns:a16="http://schemas.microsoft.com/office/drawing/2014/main" id="{0EA26CD5-FBC4-43F9-84C2-A44154D5A95B}"/>
+                <a16:creationId xmlns:a16="http://schemas.microsoft.com/office/drawing/2014/main" id="{CD4FBCE0-1B4C-473F-91CD-B01B559DF1E3}"/>
               </a:ext>
             </a:extLst>
           </p:cNvPr>
@@ -10323,7 +10331,7 @@
           <p:cNvPr id="7" name="">
             <a:extLst xmlns:a="http://schemas.openxmlformats.org/drawingml/2006/main">
               <a:ext uri="{FF2B5EF4-FFF2-40B4-BE49-F238E27FC236}">
-                <a16:creationId xmlns:a16="http://schemas.microsoft.com/office/drawing/2014/main" id="{F6551DBB-9C89-4616-9A20-8800EDD61CE5}"/>
+                <a16:creationId xmlns:a16="http://schemas.microsoft.com/office/drawing/2014/main" id="{43E7D248-4998-4D36-98B9-506D123D552A}"/>
               </a:ext>
             </a:extLst>
           </p:cNvPr>
@@ -10355,7 +10363,7 @@
           <p:cNvPr id="8" name="">
             <a:extLst xmlns:a="http://schemas.openxmlformats.org/drawingml/2006/main">
               <a:ext uri="{FF2B5EF4-FFF2-40B4-BE49-F238E27FC236}">
-                <a16:creationId xmlns:a16="http://schemas.microsoft.com/office/drawing/2014/main" id="{4CA252AC-4ED2-422E-B0E6-DB7BF8F52A72}"/>
+                <a16:creationId xmlns:a16="http://schemas.microsoft.com/office/drawing/2014/main" id="{5E1F7AD1-136D-4339-AF2B-E1F5AA5580C5}"/>
               </a:ext>
             </a:extLst>
           </p:cNvPr>
@@ -10412,7 +10420,7 @@
           <p:cNvPr id="9" name="">
             <a:extLst xmlns:a="http://schemas.openxmlformats.org/drawingml/2006/main">
               <a:ext uri="{FF2B5EF4-FFF2-40B4-BE49-F238E27FC236}">
-                <a16:creationId xmlns:a16="http://schemas.microsoft.com/office/drawing/2014/main" id="{9187B225-864E-4EB6-9C33-7FE9681B201D}"/>
+                <a16:creationId xmlns:a16="http://schemas.microsoft.com/office/drawing/2014/main" id="{C5A806FA-1D80-4ACE-9F4F-47918E1E8B29}"/>
               </a:ext>
             </a:extLst>
           </p:cNvPr>
@@ -10469,7 +10477,7 @@
           <p:cNvPr id="10" name="">
             <a:extLst xmlns:a="http://schemas.openxmlformats.org/drawingml/2006/main">
               <a:ext uri="{FF2B5EF4-FFF2-40B4-BE49-F238E27FC236}">
-                <a16:creationId xmlns:a16="http://schemas.microsoft.com/office/drawing/2014/main" id="{04830B3E-EAE8-42B0-9C53-68B76ABB560A}"/>
+                <a16:creationId xmlns:a16="http://schemas.microsoft.com/office/drawing/2014/main" id="{D30BB3D6-DD52-45D5-A512-697003951DD7}"/>
               </a:ext>
             </a:extLst>
           </p:cNvPr>
@@ -10526,7 +10534,7 @@
           <p:cNvPr id="11" name="">
             <a:extLst xmlns:a="http://schemas.openxmlformats.org/drawingml/2006/main">
               <a:ext uri="{FF2B5EF4-FFF2-40B4-BE49-F238E27FC236}">
-                <a16:creationId xmlns:a16="http://schemas.microsoft.com/office/drawing/2014/main" id="{D46D806F-3CA2-4B43-8988-FF0F8C1EB74F}"/>
+                <a16:creationId xmlns:a16="http://schemas.microsoft.com/office/drawing/2014/main" id="{8DC1E79E-166B-4F3A-BA4B-BC00FB7092C8}"/>
               </a:ext>
             </a:extLst>
           </p:cNvPr>
@@ -10583,7 +10591,7 @@
           <p:cNvPr id="12" name="">
             <a:extLst xmlns:a="http://schemas.openxmlformats.org/drawingml/2006/main">
               <a:ext uri="{FF2B5EF4-FFF2-40B4-BE49-F238E27FC236}">
-                <a16:creationId xmlns:a16="http://schemas.microsoft.com/office/drawing/2014/main" id="{EE7A4A9F-F4DA-4157-9B08-AF1D6A6BD2DA}"/>
+                <a16:creationId xmlns:a16="http://schemas.microsoft.com/office/drawing/2014/main" id="{A187FB3B-9325-45AC-84BA-5F81160DAF94}"/>
               </a:ext>
             </a:extLst>
           </p:cNvPr>
@@ -10640,7 +10648,7 @@
           <p:cNvPr id="13" name="">
             <a:extLst xmlns:a="http://schemas.openxmlformats.org/drawingml/2006/main">
               <a:ext uri="{FF2B5EF4-FFF2-40B4-BE49-F238E27FC236}">
-                <a16:creationId xmlns:a16="http://schemas.microsoft.com/office/drawing/2014/main" id="{3C03EC9A-BC30-4502-A2D6-889C18A60E52}"/>
+                <a16:creationId xmlns:a16="http://schemas.microsoft.com/office/drawing/2014/main" id="{B1B13E92-BB73-4388-A784-3A25BB16B631}"/>
               </a:ext>
             </a:extLst>
           </p:cNvPr>
@@ -10697,7 +10705,7 @@
           <p:cNvPr id="14" name="">
             <a:extLst xmlns:a="http://schemas.openxmlformats.org/drawingml/2006/main">
               <a:ext uri="{FF2B5EF4-FFF2-40B4-BE49-F238E27FC236}">
-                <a16:creationId xmlns:a16="http://schemas.microsoft.com/office/drawing/2014/main" id="{C50443DE-8D74-4E75-8663-9B288F2BC439}"/>
+                <a16:creationId xmlns:a16="http://schemas.microsoft.com/office/drawing/2014/main" id="{31FF3BC5-8BC2-4167-8122-2473ADFF4C7A}"/>
               </a:ext>
             </a:extLst>
           </p:cNvPr>
@@ -10754,7 +10762,7 @@
           <p:cNvPr id="15" name="">
             <a:extLst xmlns:a="http://schemas.openxmlformats.org/drawingml/2006/main">
               <a:ext uri="{FF2B5EF4-FFF2-40B4-BE49-F238E27FC236}">
-                <a16:creationId xmlns:a16="http://schemas.microsoft.com/office/drawing/2014/main" id="{E294A62F-29D2-49D8-AEC2-B6603CB24222}"/>
+                <a16:creationId xmlns:a16="http://schemas.microsoft.com/office/drawing/2014/main" id="{E913B377-DBEE-4207-A8D6-6EB86E787A69}"/>
               </a:ext>
             </a:extLst>
           </p:cNvPr>
@@ -10809,7 +10817,7 @@
     </p:spTree>
     <p:extLst>
       <p:ext uri="{BB962C8B-B14F-4D97-AF65-F5344CB8AC3E}">
-        <p14:creationId xmlns:p14="http://schemas.microsoft.com/office/powerpoint/2010/main" val="213160258"/>
+        <p14:creationId xmlns:p14="http://schemas.microsoft.com/office/powerpoint/2010/main" val="134204248"/>
       </p:ext>
     </p:extLst>
   </p:cSld>
@@ -10964,7 +10972,7 @@
           <p:cNvPr id="16" name="">
             <a:extLst xmlns:a="http://schemas.openxmlformats.org/drawingml/2006/main">
               <a:ext uri="{FF2B5EF4-FFF2-40B4-BE49-F238E27FC236}">
-                <a16:creationId xmlns:a16="http://schemas.microsoft.com/office/drawing/2014/main" id="{3A5E15C9-81E3-44BA-B02C-D12D3B61ADD1}"/>
+                <a16:creationId xmlns:a16="http://schemas.microsoft.com/office/drawing/2014/main" id="{55A35C62-8CFA-403F-926B-EF3AE3B1AC77}"/>
               </a:ext>
             </a:extLst>
           </p:cNvPr>
@@ -10996,7 +11004,7 @@
           <p:cNvPr id="2" name="">
             <a:extLst xmlns:a="http://schemas.openxmlformats.org/drawingml/2006/main">
               <a:ext uri="{FF2B5EF4-FFF2-40B4-BE49-F238E27FC236}">
-                <a16:creationId xmlns:a16="http://schemas.microsoft.com/office/drawing/2014/main" id="{E442BB80-3A7C-40A0-B11D-D492183D4310}"/>
+                <a16:creationId xmlns:a16="http://schemas.microsoft.com/office/drawing/2014/main" id="{9DA1ED71-2673-42FE-A970-2953335B8783}"/>
               </a:ext>
             </a:extLst>
           </p:cNvPr>
@@ -11053,7 +11061,7 @@
           <p:cNvPr id="3" name="">
             <a:extLst xmlns:a="http://schemas.openxmlformats.org/drawingml/2006/main">
               <a:ext uri="{FF2B5EF4-FFF2-40B4-BE49-F238E27FC236}">
-                <a16:creationId xmlns:a16="http://schemas.microsoft.com/office/drawing/2014/main" id="{FA28367B-FFEB-4115-A0F7-69FA4943A36A}"/>
+                <a16:creationId xmlns:a16="http://schemas.microsoft.com/office/drawing/2014/main" id="{8F813197-6B04-420D-B40D-8DB9D49CEBD4}"/>
               </a:ext>
             </a:extLst>
           </p:cNvPr>
@@ -11085,7 +11093,7 @@
           <p:cNvPr id="4" name="">
             <a:extLst xmlns:a="http://schemas.openxmlformats.org/drawingml/2006/main">
               <a:ext uri="{FF2B5EF4-FFF2-40B4-BE49-F238E27FC236}">
-                <a16:creationId xmlns:a16="http://schemas.microsoft.com/office/drawing/2014/main" id="{8C63BA1E-518D-4932-AC51-9F79804E94AB}"/>
+                <a16:creationId xmlns:a16="http://schemas.microsoft.com/office/drawing/2014/main" id="{C915FD4E-39BE-4727-B780-C39F418A31F1}"/>
               </a:ext>
             </a:extLst>
           </p:cNvPr>
@@ -11142,7 +11150,7 @@
           <p:cNvPr id="5" name="">
             <a:extLst xmlns:a="http://schemas.openxmlformats.org/drawingml/2006/main">
               <a:ext uri="{FF2B5EF4-FFF2-40B4-BE49-F238E27FC236}">
-                <a16:creationId xmlns:a16="http://schemas.microsoft.com/office/drawing/2014/main" id="{0F5CBE10-0B6B-4B6C-8FEB-E60D5026B512}"/>
+                <a16:creationId xmlns:a16="http://schemas.microsoft.com/office/drawing/2014/main" id="{23EDEB4C-A6C5-483B-B48A-2E4104AF8574}"/>
               </a:ext>
             </a:extLst>
           </p:cNvPr>
@@ -11199,7 +11207,7 @@
           <p:cNvPr id="6" name="">
             <a:extLst xmlns:a="http://schemas.openxmlformats.org/drawingml/2006/main">
               <a:ext uri="{FF2B5EF4-FFF2-40B4-BE49-F238E27FC236}">
-                <a16:creationId xmlns:a16="http://schemas.microsoft.com/office/drawing/2014/main" id="{79B654F0-ED73-4494-9528-6DC2D4A358AF}"/>
+                <a16:creationId xmlns:a16="http://schemas.microsoft.com/office/drawing/2014/main" id="{1435F4A9-CABA-42CF-BAAA-887836C44EEF}"/>
               </a:ext>
             </a:extLst>
           </p:cNvPr>
@@ -11256,7 +11264,7 @@
           <p:cNvPr id="7" name="">
             <a:extLst xmlns:a="http://schemas.openxmlformats.org/drawingml/2006/main">
               <a:ext uri="{FF2B5EF4-FFF2-40B4-BE49-F238E27FC236}">
-                <a16:creationId xmlns:a16="http://schemas.microsoft.com/office/drawing/2014/main" id="{0B0786F5-0B0F-4B1D-BC54-9CCEA05585D1}"/>
+                <a16:creationId xmlns:a16="http://schemas.microsoft.com/office/drawing/2014/main" id="{E00F7917-52B5-44E3-9DDC-0E7D20959A82}"/>
               </a:ext>
             </a:extLst>
           </p:cNvPr>
@@ -11288,7 +11296,7 @@
           <p:cNvPr id="8" name="">
             <a:extLst xmlns:a="http://schemas.openxmlformats.org/drawingml/2006/main">
               <a:ext uri="{FF2B5EF4-FFF2-40B4-BE49-F238E27FC236}">
-                <a16:creationId xmlns:a16="http://schemas.microsoft.com/office/drawing/2014/main" id="{59CD0E76-8FFF-4184-9D9D-35A75EBF03F3}"/>
+                <a16:creationId xmlns:a16="http://schemas.microsoft.com/office/drawing/2014/main" id="{39C02E0B-806D-44AD-AC1B-82677247C424}"/>
               </a:ext>
             </a:extLst>
           </p:cNvPr>
@@ -11345,7 +11353,7 @@
           <p:cNvPr id="9" name="">
             <a:extLst xmlns:a="http://schemas.openxmlformats.org/drawingml/2006/main">
               <a:ext uri="{FF2B5EF4-FFF2-40B4-BE49-F238E27FC236}">
-                <a16:creationId xmlns:a16="http://schemas.microsoft.com/office/drawing/2014/main" id="{C2A3B061-C72E-4F88-BAEF-91A0E067F47D}"/>
+                <a16:creationId xmlns:a16="http://schemas.microsoft.com/office/drawing/2014/main" id="{B8483E56-AA52-469F-85E8-6BE80E5A5357}"/>
               </a:ext>
             </a:extLst>
           </p:cNvPr>
@@ -11406,7 +11414,7 @@
           <p:nvPr/>
         </p:nvPicPr>
         <p:blipFill>
-          <a:blip xmlns:r="http://schemas.openxmlformats.org/officeDocument/2006/relationships" xmlns:a="http://schemas.openxmlformats.org/drawingml/2006/main" r:embed="R3685705f8b314a58"/>
+          <a:blip xmlns:r="http://schemas.openxmlformats.org/officeDocument/2006/relationships" xmlns:a="http://schemas.openxmlformats.org/drawingml/2006/main" r:embed="R0e7c48f870934f07"/>
           <a:stretch xmlns:a="http://schemas.openxmlformats.org/drawingml/2006/main"/>
         </p:blipFill>
         <p:spPr>
@@ -11424,7 +11432,7 @@
           <p:cNvPr id="11" name="">
             <a:extLst xmlns:a="http://schemas.openxmlformats.org/drawingml/2006/main">
               <a:ext uri="{FF2B5EF4-FFF2-40B4-BE49-F238E27FC236}">
-                <a16:creationId xmlns:a16="http://schemas.microsoft.com/office/drawing/2014/main" id="{31E28F5D-CCB5-4A83-B02F-281578373E30}"/>
+                <a16:creationId xmlns:a16="http://schemas.microsoft.com/office/drawing/2014/main" id="{DCEAAA82-1DE2-4C48-9D3B-63F6D58C2E41}"/>
               </a:ext>
             </a:extLst>
           </p:cNvPr>
@@ -11481,7 +11489,7 @@
           <p:cNvPr id="12" name="">
             <a:extLst xmlns:a="http://schemas.openxmlformats.org/drawingml/2006/main">
               <a:ext uri="{FF2B5EF4-FFF2-40B4-BE49-F238E27FC236}">
-                <a16:creationId xmlns:a16="http://schemas.microsoft.com/office/drawing/2014/main" id="{B7634CEE-052E-41EC-B67C-7F6C483EE077}"/>
+                <a16:creationId xmlns:a16="http://schemas.microsoft.com/office/drawing/2014/main" id="{D8010972-936C-4F81-B514-1D30631E3284}"/>
               </a:ext>
             </a:extLst>
           </p:cNvPr>
@@ -11538,7 +11546,7 @@
           <p:cNvPr id="13" name="">
             <a:extLst xmlns:a="http://schemas.openxmlformats.org/drawingml/2006/main">
               <a:ext uri="{FF2B5EF4-FFF2-40B4-BE49-F238E27FC236}">
-                <a16:creationId xmlns:a16="http://schemas.microsoft.com/office/drawing/2014/main" id="{33F06E00-068C-4263-BE2A-56B3C3961ED2}"/>
+                <a16:creationId xmlns:a16="http://schemas.microsoft.com/office/drawing/2014/main" id="{E43804AC-1CD6-411B-A501-CC9982017C67}"/>
               </a:ext>
             </a:extLst>
           </p:cNvPr>
@@ -11570,7 +11578,7 @@
           <p:cNvPr id="14" name="">
             <a:extLst xmlns:a="http://schemas.openxmlformats.org/drawingml/2006/main">
               <a:ext uri="{FF2B5EF4-FFF2-40B4-BE49-F238E27FC236}">
-                <a16:creationId xmlns:a16="http://schemas.microsoft.com/office/drawing/2014/main" id="{59A27213-9491-4945-A000-A1FCC663BC46}"/>
+                <a16:creationId xmlns:a16="http://schemas.microsoft.com/office/drawing/2014/main" id="{EA3CAFE3-7E86-4918-9ABC-F58E48C219CD}"/>
               </a:ext>
             </a:extLst>
           </p:cNvPr>
@@ -11627,7 +11635,7 @@
           <p:cNvPr id="15" name="">
             <a:extLst xmlns:a="http://schemas.openxmlformats.org/drawingml/2006/main">
               <a:ext uri="{FF2B5EF4-FFF2-40B4-BE49-F238E27FC236}">
-                <a16:creationId xmlns:a16="http://schemas.microsoft.com/office/drawing/2014/main" id="{1159186A-87D0-4D42-BE40-B5D5D0AF0A1C}"/>
+                <a16:creationId xmlns:a16="http://schemas.microsoft.com/office/drawing/2014/main" id="{84FBB549-54EC-4D83-9E46-2E566EA9AA14}"/>
               </a:ext>
             </a:extLst>
           </p:cNvPr>
@@ -11682,7 +11690,7 @@
     </p:spTree>
     <p:extLst>
       <p:ext uri="{BB962C8B-B14F-4D97-AF65-F5344CB8AC3E}">
-        <p14:creationId xmlns:p14="http://schemas.microsoft.com/office/powerpoint/2010/main" val="605420969"/>
+        <p14:creationId xmlns:p14="http://schemas.microsoft.com/office/powerpoint/2010/main" val="682370632"/>
       </p:ext>
     </p:extLst>
   </p:cSld>
@@ -11837,7 +11845,7 @@
           <p:cNvPr id="23" name="">
             <a:extLst xmlns:a="http://schemas.openxmlformats.org/drawingml/2006/main">
               <a:ext uri="{FF2B5EF4-FFF2-40B4-BE49-F238E27FC236}">
-                <a16:creationId xmlns:a16="http://schemas.microsoft.com/office/drawing/2014/main" id="{8C34CAF0-6C28-4D75-B861-AF3C99555B29}"/>
+                <a16:creationId xmlns:a16="http://schemas.microsoft.com/office/drawing/2014/main" id="{78DAAD52-1D98-49E5-81A8-12842B8DA6B5}"/>
               </a:ext>
             </a:extLst>
           </p:cNvPr>
@@ -11869,7 +11877,7 @@
           <p:cNvPr id="2" name="">
             <a:extLst xmlns:a="http://schemas.openxmlformats.org/drawingml/2006/main">
               <a:ext uri="{FF2B5EF4-FFF2-40B4-BE49-F238E27FC236}">
-                <a16:creationId xmlns:a16="http://schemas.microsoft.com/office/drawing/2014/main" id="{CDF0073B-31D0-4BA0-80A2-F83121F3D267}"/>
+                <a16:creationId xmlns:a16="http://schemas.microsoft.com/office/drawing/2014/main" id="{ADFC1397-3DFA-4A74-A329-0FAD864F34BC}"/>
               </a:ext>
             </a:extLst>
           </p:cNvPr>
@@ -11926,7 +11934,7 @@
           <p:cNvPr id="3" name="">
             <a:extLst xmlns:a="http://schemas.openxmlformats.org/drawingml/2006/main">
               <a:ext uri="{FF2B5EF4-FFF2-40B4-BE49-F238E27FC236}">
-                <a16:creationId xmlns:a16="http://schemas.microsoft.com/office/drawing/2014/main" id="{6339D275-9115-4585-8A45-4C824F222263}"/>
+                <a16:creationId xmlns:a16="http://schemas.microsoft.com/office/drawing/2014/main" id="{EDC00C63-7736-42BD-8122-A77766EE22F9}"/>
               </a:ext>
             </a:extLst>
           </p:cNvPr>
@@ -11958,7 +11966,7 @@
           <p:cNvPr id="4" name="">
             <a:extLst xmlns:a="http://schemas.openxmlformats.org/drawingml/2006/main">
               <a:ext uri="{FF2B5EF4-FFF2-40B4-BE49-F238E27FC236}">
-                <a16:creationId xmlns:a16="http://schemas.microsoft.com/office/drawing/2014/main" id="{45BF3752-89E1-4E27-90F3-74B3D54B293D}"/>
+                <a16:creationId xmlns:a16="http://schemas.microsoft.com/office/drawing/2014/main" id="{4D30D888-18D2-4D1A-860D-04A18EFF5A5C}"/>
               </a:ext>
             </a:extLst>
           </p:cNvPr>
@@ -12015,7 +12023,7 @@
           <p:cNvPr id="5" name="">
             <a:extLst xmlns:a="http://schemas.openxmlformats.org/drawingml/2006/main">
               <a:ext uri="{FF2B5EF4-FFF2-40B4-BE49-F238E27FC236}">
-                <a16:creationId xmlns:a16="http://schemas.microsoft.com/office/drawing/2014/main" id="{10D4E48D-EF35-4746-BB95-5BA792E29ECB}"/>
+                <a16:creationId xmlns:a16="http://schemas.microsoft.com/office/drawing/2014/main" id="{8FADA989-79E4-4D31-A0C0-D935C2C21585}"/>
               </a:ext>
             </a:extLst>
           </p:cNvPr>
@@ -12072,7 +12080,7 @@
           <p:cNvPr id="6" name="">
             <a:extLst xmlns:a="http://schemas.openxmlformats.org/drawingml/2006/main">
               <a:ext uri="{FF2B5EF4-FFF2-40B4-BE49-F238E27FC236}">
-                <a16:creationId xmlns:a16="http://schemas.microsoft.com/office/drawing/2014/main" id="{CF4F094C-D757-47B2-82A2-0F557D094E9F}"/>
+                <a16:creationId xmlns:a16="http://schemas.microsoft.com/office/drawing/2014/main" id="{9AAEE39E-D6A6-4B9B-A0AD-7EA7BE8E2EBB}"/>
               </a:ext>
             </a:extLst>
           </p:cNvPr>
@@ -12129,7 +12137,7 @@
           <p:cNvPr id="7" name="">
             <a:extLst xmlns:a="http://schemas.openxmlformats.org/drawingml/2006/main">
               <a:ext uri="{FF2B5EF4-FFF2-40B4-BE49-F238E27FC236}">
-                <a16:creationId xmlns:a16="http://schemas.microsoft.com/office/drawing/2014/main" id="{3AF0C819-5F8C-4F8C-ADEC-4EED677FC2C6}"/>
+                <a16:creationId xmlns:a16="http://schemas.microsoft.com/office/drawing/2014/main" id="{CE187E68-CFD5-4A8E-ACFA-25D5F29F9458}"/>
               </a:ext>
             </a:extLst>
           </p:cNvPr>
@@ -12161,7 +12169,7 @@
           <p:cNvPr id="8" name="">
             <a:extLst xmlns:a="http://schemas.openxmlformats.org/drawingml/2006/main">
               <a:ext uri="{FF2B5EF4-FFF2-40B4-BE49-F238E27FC236}">
-                <a16:creationId xmlns:a16="http://schemas.microsoft.com/office/drawing/2014/main" id="{3777CA0E-CF2E-4EFF-BF09-AFE4874B538F}"/>
+                <a16:creationId xmlns:a16="http://schemas.microsoft.com/office/drawing/2014/main" id="{DDBBCDEF-2D74-401E-B3F9-63BCACD7A490}"/>
               </a:ext>
             </a:extLst>
           </p:cNvPr>
@@ -12218,7 +12226,7 @@
           <p:cNvPr id="9" name="">
             <a:extLst xmlns:a="http://schemas.openxmlformats.org/drawingml/2006/main">
               <a:ext uri="{FF2B5EF4-FFF2-40B4-BE49-F238E27FC236}">
-                <a16:creationId xmlns:a16="http://schemas.microsoft.com/office/drawing/2014/main" id="{EFFE92F2-DA7C-4EF1-A11D-5A6E2E81B6FB}"/>
+                <a16:creationId xmlns:a16="http://schemas.microsoft.com/office/drawing/2014/main" id="{0CB8C8CC-9BD6-404A-8487-FA5EE234756F}"/>
               </a:ext>
             </a:extLst>
           </p:cNvPr>
@@ -12275,7 +12283,7 @@
           <p:cNvPr id="10" name="">
             <a:extLst xmlns:a="http://schemas.openxmlformats.org/drawingml/2006/main">
               <a:ext uri="{FF2B5EF4-FFF2-40B4-BE49-F238E27FC236}">
-                <a16:creationId xmlns:a16="http://schemas.microsoft.com/office/drawing/2014/main" id="{DD634A70-1CDC-4CF7-8526-C7BE4081A629}"/>
+                <a16:creationId xmlns:a16="http://schemas.microsoft.com/office/drawing/2014/main" id="{3F1249FA-49C8-43F6-9FE7-B8B2712EA877}"/>
               </a:ext>
             </a:extLst>
           </p:cNvPr>
@@ -12309,7 +12317,7 @@
           <p:cNvPr id="11" name="">
             <a:extLst xmlns:a="http://schemas.openxmlformats.org/drawingml/2006/main">
               <a:ext uri="{FF2B5EF4-FFF2-40B4-BE49-F238E27FC236}">
-                <a16:creationId xmlns:a16="http://schemas.microsoft.com/office/drawing/2014/main" id="{7A34C83E-848D-4E7F-A569-3CE37AAC3842}"/>
+                <a16:creationId xmlns:a16="http://schemas.microsoft.com/office/drawing/2014/main" id="{769E5EC8-2A1F-43F6-BDF7-B9C95BC17A20}"/>
               </a:ext>
             </a:extLst>
           </p:cNvPr>
@@ -12341,7 +12349,7 @@
           <p:cNvPr id="12" name="">
             <a:extLst xmlns:a="http://schemas.openxmlformats.org/drawingml/2006/main">
               <a:ext uri="{FF2B5EF4-FFF2-40B4-BE49-F238E27FC236}">
-                <a16:creationId xmlns:a16="http://schemas.microsoft.com/office/drawing/2014/main" id="{110AE579-0897-44F2-9583-BBA76925185F}"/>
+                <a16:creationId xmlns:a16="http://schemas.microsoft.com/office/drawing/2014/main" id="{A1401091-0E40-4324-A91A-27F2EDCDA8DA}"/>
               </a:ext>
             </a:extLst>
           </p:cNvPr>
@@ -12398,7 +12406,7 @@
           <p:cNvPr id="13" name="">
             <a:extLst xmlns:a="http://schemas.openxmlformats.org/drawingml/2006/main">
               <a:ext uri="{FF2B5EF4-FFF2-40B4-BE49-F238E27FC236}">
-                <a16:creationId xmlns:a16="http://schemas.microsoft.com/office/drawing/2014/main" id="{737EAAFC-702B-4B0B-A161-F1F18B2160BF}"/>
+                <a16:creationId xmlns:a16="http://schemas.microsoft.com/office/drawing/2014/main" id="{F47CEBC1-F62E-45E6-9AEF-C9920C3CE3ED}"/>
               </a:ext>
             </a:extLst>
           </p:cNvPr>
@@ -12455,7 +12463,7 @@
           <p:cNvPr id="14" name="">
             <a:extLst xmlns:a="http://schemas.openxmlformats.org/drawingml/2006/main">
               <a:ext uri="{FF2B5EF4-FFF2-40B4-BE49-F238E27FC236}">
-                <a16:creationId xmlns:a16="http://schemas.microsoft.com/office/drawing/2014/main" id="{D8E139CA-7D5A-4D80-B5D2-83FF2394BF22}"/>
+                <a16:creationId xmlns:a16="http://schemas.microsoft.com/office/drawing/2014/main" id="{22532CC3-A457-4C6D-918A-A24C1DA8674C}"/>
               </a:ext>
             </a:extLst>
           </p:cNvPr>
@@ -12489,7 +12497,7 @@
           <p:cNvPr id="15" name="">
             <a:extLst xmlns:a="http://schemas.openxmlformats.org/drawingml/2006/main">
               <a:ext uri="{FF2B5EF4-FFF2-40B4-BE49-F238E27FC236}">
-                <a16:creationId xmlns:a16="http://schemas.microsoft.com/office/drawing/2014/main" id="{4EF0C1B0-C418-4C30-BCBA-1BFCF5D4D8B1}"/>
+                <a16:creationId xmlns:a16="http://schemas.microsoft.com/office/drawing/2014/main" id="{C6820483-699C-4925-95E7-88FFF746D5B6}"/>
               </a:ext>
             </a:extLst>
           </p:cNvPr>
@@ -12521,7 +12529,7 @@
           <p:cNvPr id="16" name="">
             <a:extLst xmlns:a="http://schemas.openxmlformats.org/drawingml/2006/main">
               <a:ext uri="{FF2B5EF4-FFF2-40B4-BE49-F238E27FC236}">
-                <a16:creationId xmlns:a16="http://schemas.microsoft.com/office/drawing/2014/main" id="{823AAD49-80E8-4CB9-8758-E6A8B71F5A1A}"/>
+                <a16:creationId xmlns:a16="http://schemas.microsoft.com/office/drawing/2014/main" id="{C1FA2916-5239-4AC0-9C9F-1E3264CC1D3B}"/>
               </a:ext>
             </a:extLst>
           </p:cNvPr>
@@ -12578,7 +12586,7 @@
           <p:cNvPr id="17" name="">
             <a:extLst xmlns:a="http://schemas.openxmlformats.org/drawingml/2006/main">
               <a:ext uri="{FF2B5EF4-FFF2-40B4-BE49-F238E27FC236}">
-                <a16:creationId xmlns:a16="http://schemas.microsoft.com/office/drawing/2014/main" id="{E8BCB529-BC3C-43C2-A47D-CE06314FF1B2}"/>
+                <a16:creationId xmlns:a16="http://schemas.microsoft.com/office/drawing/2014/main" id="{10C22064-1297-4FA3-A551-72F8062FD108}"/>
               </a:ext>
             </a:extLst>
           </p:cNvPr>
@@ -12635,7 +12643,7 @@
           <p:cNvPr id="18" name="">
             <a:extLst xmlns:a="http://schemas.openxmlformats.org/drawingml/2006/main">
               <a:ext uri="{FF2B5EF4-FFF2-40B4-BE49-F238E27FC236}">
-                <a16:creationId xmlns:a16="http://schemas.microsoft.com/office/drawing/2014/main" id="{65010904-CCC4-4948-9530-862F1E87912E}"/>
+                <a16:creationId xmlns:a16="http://schemas.microsoft.com/office/drawing/2014/main" id="{FFE97B31-AF62-446E-A284-E692043F7F53}"/>
               </a:ext>
             </a:extLst>
           </p:cNvPr>
@@ -12669,7 +12677,7 @@
           <p:cNvPr id="19" name="">
             <a:extLst xmlns:a="http://schemas.openxmlformats.org/drawingml/2006/main">
               <a:ext uri="{FF2B5EF4-FFF2-40B4-BE49-F238E27FC236}">
-                <a16:creationId xmlns:a16="http://schemas.microsoft.com/office/drawing/2014/main" id="{390170C2-BB3E-4E68-A988-43BBF03ED199}"/>
+                <a16:creationId xmlns:a16="http://schemas.microsoft.com/office/drawing/2014/main" id="{0C0170EC-2168-415C-A0E7-11AB1D495DD7}"/>
               </a:ext>
             </a:extLst>
           </p:cNvPr>
@@ -12701,7 +12709,7 @@
           <p:cNvPr id="20" name="">
             <a:extLst xmlns:a="http://schemas.openxmlformats.org/drawingml/2006/main">
               <a:ext uri="{FF2B5EF4-FFF2-40B4-BE49-F238E27FC236}">
-                <a16:creationId xmlns:a16="http://schemas.microsoft.com/office/drawing/2014/main" id="{4839F571-D615-4558-A0D0-DD2433B999B1}"/>
+                <a16:creationId xmlns:a16="http://schemas.microsoft.com/office/drawing/2014/main" id="{85EFC812-4D0F-442F-ACD3-8EA97DE2A27B}"/>
               </a:ext>
             </a:extLst>
           </p:cNvPr>
@@ -12758,7 +12766,7 @@
           <p:cNvPr id="21" name="">
             <a:extLst xmlns:a="http://schemas.openxmlformats.org/drawingml/2006/main">
               <a:ext uri="{FF2B5EF4-FFF2-40B4-BE49-F238E27FC236}">
-                <a16:creationId xmlns:a16="http://schemas.microsoft.com/office/drawing/2014/main" id="{C09933BB-AF96-4842-8D94-AFC49EEBC97A}"/>
+                <a16:creationId xmlns:a16="http://schemas.microsoft.com/office/drawing/2014/main" id="{2AB000A7-A8D5-41BE-8DE1-D351AF3A67FA}"/>
               </a:ext>
             </a:extLst>
           </p:cNvPr>
@@ -12815,7 +12823,7 @@
           <p:cNvPr id="22" name="">
             <a:extLst xmlns:a="http://schemas.openxmlformats.org/drawingml/2006/main">
               <a:ext uri="{FF2B5EF4-FFF2-40B4-BE49-F238E27FC236}">
-                <a16:creationId xmlns:a16="http://schemas.microsoft.com/office/drawing/2014/main" id="{9DD96A0C-6C2D-4C22-A227-6B08D67227B9}"/>
+                <a16:creationId xmlns:a16="http://schemas.microsoft.com/office/drawing/2014/main" id="{CDB2B150-D63D-40E7-833E-01B83797010F}"/>
               </a:ext>
             </a:extLst>
           </p:cNvPr>
@@ -12870,7 +12878,7 @@
     </p:spTree>
     <p:extLst>
       <p:ext uri="{BB962C8B-B14F-4D97-AF65-F5344CB8AC3E}">
-        <p14:creationId xmlns:p14="http://schemas.microsoft.com/office/powerpoint/2010/main" val="720529668"/>
+        <p14:creationId xmlns:p14="http://schemas.microsoft.com/office/powerpoint/2010/main" val="1807292552"/>
       </p:ext>
     </p:extLst>
   </p:cSld>
@@ -13071,7 +13079,7 @@
           <p:cNvPr id="22" name="">
             <a:extLst xmlns:a="http://schemas.openxmlformats.org/drawingml/2006/main">
               <a:ext uri="{FF2B5EF4-FFF2-40B4-BE49-F238E27FC236}">
-                <a16:creationId xmlns:a16="http://schemas.microsoft.com/office/drawing/2014/main" id="{0D9AC5E6-56E5-4E8C-A0D4-9F93D674B6DE}"/>
+                <a16:creationId xmlns:a16="http://schemas.microsoft.com/office/drawing/2014/main" id="{C937B604-3DEC-4C01-BC4A-7BCDCAD6CC54}"/>
               </a:ext>
             </a:extLst>
           </p:cNvPr>
@@ -13103,7 +13111,7 @@
           <p:cNvPr id="2" name="">
             <a:extLst xmlns:a="http://schemas.openxmlformats.org/drawingml/2006/main">
               <a:ext uri="{FF2B5EF4-FFF2-40B4-BE49-F238E27FC236}">
-                <a16:creationId xmlns:a16="http://schemas.microsoft.com/office/drawing/2014/main" id="{70A5C7E2-0AE1-4DB3-B202-8EDA6EC8935B}"/>
+                <a16:creationId xmlns:a16="http://schemas.microsoft.com/office/drawing/2014/main" id="{5CA697A9-BD60-457B-B88A-BF8E865C6B9F}"/>
               </a:ext>
             </a:extLst>
           </p:cNvPr>
@@ -13160,7 +13168,7 @@
           <p:cNvPr id="3" name="">
             <a:extLst xmlns:a="http://schemas.openxmlformats.org/drawingml/2006/main">
               <a:ext uri="{FF2B5EF4-FFF2-40B4-BE49-F238E27FC236}">
-                <a16:creationId xmlns:a16="http://schemas.microsoft.com/office/drawing/2014/main" id="{FFE7AFEE-704E-4301-B044-E64487A20550}"/>
+                <a16:creationId xmlns:a16="http://schemas.microsoft.com/office/drawing/2014/main" id="{CA9229E0-DFA9-4BAC-B82A-5FA8ED0A842D}"/>
               </a:ext>
             </a:extLst>
           </p:cNvPr>
@@ -13192,7 +13200,7 @@
           <p:cNvPr id="4" name="">
             <a:extLst xmlns:a="http://schemas.openxmlformats.org/drawingml/2006/main">
               <a:ext uri="{FF2B5EF4-FFF2-40B4-BE49-F238E27FC236}">
-                <a16:creationId xmlns:a16="http://schemas.microsoft.com/office/drawing/2014/main" id="{D6E6F8BA-4FB9-4DC6-A7AB-75F59B5F2B14}"/>
+                <a16:creationId xmlns:a16="http://schemas.microsoft.com/office/drawing/2014/main" id="{C1CD862D-6C84-45C1-A125-42BB369009F5}"/>
               </a:ext>
             </a:extLst>
           </p:cNvPr>
@@ -13249,7 +13257,7 @@
           <p:cNvPr id="5" name="">
             <a:extLst xmlns:a="http://schemas.openxmlformats.org/drawingml/2006/main">
               <a:ext uri="{FF2B5EF4-FFF2-40B4-BE49-F238E27FC236}">
-                <a16:creationId xmlns:a16="http://schemas.microsoft.com/office/drawing/2014/main" id="{0A80B18B-25EC-4E0A-9BCC-019B9A088C53}"/>
+                <a16:creationId xmlns:a16="http://schemas.microsoft.com/office/drawing/2014/main" id="{26148CD8-0885-4E2C-8E87-43DD5197E4AA}"/>
               </a:ext>
             </a:extLst>
           </p:cNvPr>
@@ -13306,7 +13314,7 @@
           <p:cNvPr id="6" name="">
             <a:extLst xmlns:a="http://schemas.openxmlformats.org/drawingml/2006/main">
               <a:ext uri="{FF2B5EF4-FFF2-40B4-BE49-F238E27FC236}">
-                <a16:creationId xmlns:a16="http://schemas.microsoft.com/office/drawing/2014/main" id="{0C2F9E89-21F4-4A40-905F-E1CBB1F3112A}"/>
+                <a16:creationId xmlns:a16="http://schemas.microsoft.com/office/drawing/2014/main" id="{53960C12-D0BC-4589-AB15-F00D0C02E06A}"/>
               </a:ext>
             </a:extLst>
           </p:cNvPr>
@@ -13363,7 +13371,7 @@
           <p:cNvPr id="7" name="">
             <a:extLst xmlns:a="http://schemas.openxmlformats.org/drawingml/2006/main">
               <a:ext uri="{FF2B5EF4-FFF2-40B4-BE49-F238E27FC236}">
-                <a16:creationId xmlns:a16="http://schemas.microsoft.com/office/drawing/2014/main" id="{F5AD31B9-4DCA-44F3-8A73-C452F4036127}"/>
+                <a16:creationId xmlns:a16="http://schemas.microsoft.com/office/drawing/2014/main" id="{C0947B23-F84B-4D25-B1E4-9751E400BD5D}"/>
               </a:ext>
             </a:extLst>
           </p:cNvPr>
@@ -13395,7 +13403,7 @@
           <p:cNvPr id="8" name="">
             <a:extLst xmlns:a="http://schemas.openxmlformats.org/drawingml/2006/main">
               <a:ext uri="{FF2B5EF4-FFF2-40B4-BE49-F238E27FC236}">
-                <a16:creationId xmlns:a16="http://schemas.microsoft.com/office/drawing/2014/main" id="{88FC0064-09D8-44A9-811D-52E9F6CE5C57}"/>
+                <a16:creationId xmlns:a16="http://schemas.microsoft.com/office/drawing/2014/main" id="{E72F4B72-4E44-4985-BA30-ABF9F2E250A4}"/>
               </a:ext>
             </a:extLst>
           </p:cNvPr>
@@ -13452,7 +13460,7 @@
           <p:cNvPr id="9" name="">
             <a:extLst xmlns:a="http://schemas.openxmlformats.org/drawingml/2006/main">
               <a:ext uri="{FF2B5EF4-FFF2-40B4-BE49-F238E27FC236}">
-                <a16:creationId xmlns:a16="http://schemas.microsoft.com/office/drawing/2014/main" id="{927ADF75-8922-4231-9149-12FD2F2DD268}"/>
+                <a16:creationId xmlns:a16="http://schemas.microsoft.com/office/drawing/2014/main" id="{5FED426C-0849-476B-BA5D-97C05A5B9264}"/>
               </a:ext>
             </a:extLst>
           </p:cNvPr>
@@ -13509,7 +13517,7 @@
           <p:cNvPr id="10" name="">
             <a:extLst xmlns:a="http://schemas.openxmlformats.org/drawingml/2006/main">
               <a:ext uri="{FF2B5EF4-FFF2-40B4-BE49-F238E27FC236}">
-                <a16:creationId xmlns:a16="http://schemas.microsoft.com/office/drawing/2014/main" id="{C2060517-E1E7-4BD9-8D70-40C65F97F064}"/>
+                <a16:creationId xmlns:a16="http://schemas.microsoft.com/office/drawing/2014/main" id="{9070246D-278D-4688-9138-40457FFC2AFA}"/>
               </a:ext>
             </a:extLst>
           </p:cNvPr>
@@ -13543,7 +13551,7 @@
           <p:cNvPr id="11" name="">
             <a:extLst xmlns:a="http://schemas.openxmlformats.org/drawingml/2006/main">
               <a:ext uri="{FF2B5EF4-FFF2-40B4-BE49-F238E27FC236}">
-                <a16:creationId xmlns:a16="http://schemas.microsoft.com/office/drawing/2014/main" id="{1184400D-F798-4C5F-9366-636FB38B79BD}"/>
+                <a16:creationId xmlns:a16="http://schemas.microsoft.com/office/drawing/2014/main" id="{A29C7991-A26A-4886-BC3D-2EE35E2032EC}"/>
               </a:ext>
             </a:extLst>
           </p:cNvPr>
@@ -13575,7 +13583,7 @@
           <p:cNvPr id="12" name="">
             <a:extLst xmlns:a="http://schemas.openxmlformats.org/drawingml/2006/main">
               <a:ext uri="{FF2B5EF4-FFF2-40B4-BE49-F238E27FC236}">
-                <a16:creationId xmlns:a16="http://schemas.microsoft.com/office/drawing/2014/main" id="{C8816C19-B9FA-4EF4-848B-D52414DF9B47}"/>
+                <a16:creationId xmlns:a16="http://schemas.microsoft.com/office/drawing/2014/main" id="{24D0BDEE-FAD1-41A0-8D5C-3D0176FE3B79}"/>
               </a:ext>
             </a:extLst>
           </p:cNvPr>
@@ -13632,7 +13640,7 @@
           <p:cNvPr id="13" name="">
             <a:extLst xmlns:a="http://schemas.openxmlformats.org/drawingml/2006/main">
               <a:ext uri="{FF2B5EF4-FFF2-40B4-BE49-F238E27FC236}">
-                <a16:creationId xmlns:a16="http://schemas.microsoft.com/office/drawing/2014/main" id="{DA4BE60C-2217-4BE3-A55F-86CCC71065C5}"/>
+                <a16:creationId xmlns:a16="http://schemas.microsoft.com/office/drawing/2014/main" id="{2E14EF8F-D934-4795-B3AB-CA90D1DAE402}"/>
               </a:ext>
             </a:extLst>
           </p:cNvPr>
@@ -13689,7 +13697,7 @@
           <p:cNvPr id="14" name="">
             <a:extLst xmlns:a="http://schemas.openxmlformats.org/drawingml/2006/main">
               <a:ext uri="{FF2B5EF4-FFF2-40B4-BE49-F238E27FC236}">
-                <a16:creationId xmlns:a16="http://schemas.microsoft.com/office/drawing/2014/main" id="{1A3EB711-51CA-4F89-BE69-BBCE673087AD}"/>
+                <a16:creationId xmlns:a16="http://schemas.microsoft.com/office/drawing/2014/main" id="{55955097-2597-4F6A-B115-960449767FB1}"/>
               </a:ext>
             </a:extLst>
           </p:cNvPr>
@@ -13723,7 +13731,7 @@
           <p:cNvPr id="15" name="">
             <a:extLst xmlns:a="http://schemas.openxmlformats.org/drawingml/2006/main">
               <a:ext uri="{FF2B5EF4-FFF2-40B4-BE49-F238E27FC236}">
-                <a16:creationId xmlns:a16="http://schemas.microsoft.com/office/drawing/2014/main" id="{C004BF47-BD29-4B6B-943E-83C8A21233E1}"/>
+                <a16:creationId xmlns:a16="http://schemas.microsoft.com/office/drawing/2014/main" id="{2FAA60F6-CE4F-4D79-B452-77FF2A8708DC}"/>
               </a:ext>
             </a:extLst>
           </p:cNvPr>
@@ -13755,7 +13763,7 @@
           <p:cNvPr id="16" name="">
             <a:extLst xmlns:a="http://schemas.openxmlformats.org/drawingml/2006/main">
               <a:ext uri="{FF2B5EF4-FFF2-40B4-BE49-F238E27FC236}">
-                <a16:creationId xmlns:a16="http://schemas.microsoft.com/office/drawing/2014/main" id="{8E153D84-3F26-4E48-8C42-F18ECD6A1BBA}"/>
+                <a16:creationId xmlns:a16="http://schemas.microsoft.com/office/drawing/2014/main" id="{BBA69ACA-3FBC-4B55-AA73-88092F57C4C0}"/>
               </a:ext>
             </a:extLst>
           </p:cNvPr>
@@ -13812,7 +13820,7 @@
           <p:cNvPr id="17" name="">
             <a:extLst xmlns:a="http://schemas.openxmlformats.org/drawingml/2006/main">
               <a:ext uri="{FF2B5EF4-FFF2-40B4-BE49-F238E27FC236}">
-                <a16:creationId xmlns:a16="http://schemas.microsoft.com/office/drawing/2014/main" id="{EB023435-2D8E-4D89-A05A-C6CD95C8DCB4}"/>
+                <a16:creationId xmlns:a16="http://schemas.microsoft.com/office/drawing/2014/main" id="{D395FC49-571A-48F5-9384-E39F35E8D946}"/>
               </a:ext>
             </a:extLst>
           </p:cNvPr>
@@ -13869,7 +13877,7 @@
           <p:cNvPr id="18" name="">
             <a:extLst xmlns:a="http://schemas.openxmlformats.org/drawingml/2006/main">
               <a:ext uri="{FF2B5EF4-FFF2-40B4-BE49-F238E27FC236}">
-                <a16:creationId xmlns:a16="http://schemas.microsoft.com/office/drawing/2014/main" id="{ED611905-E875-4F5A-B522-6E8A1CF7448B}"/>
+                <a16:creationId xmlns:a16="http://schemas.microsoft.com/office/drawing/2014/main" id="{4D8A6CF5-A69E-4E7A-A129-66022224E089}"/>
               </a:ext>
             </a:extLst>
           </p:cNvPr>
@@ -13903,7 +13911,7 @@
           <p:cNvPr id="19" name="">
             <a:extLst xmlns:a="http://schemas.openxmlformats.org/drawingml/2006/main">
               <a:ext uri="{FF2B5EF4-FFF2-40B4-BE49-F238E27FC236}">
-                <a16:creationId xmlns:a16="http://schemas.microsoft.com/office/drawing/2014/main" id="{8A741C15-C44F-4920-AB37-3A3D1192E99E}"/>
+                <a16:creationId xmlns:a16="http://schemas.microsoft.com/office/drawing/2014/main" id="{C3C80C5F-44B8-4A0C-952C-EB88B5C9C3C1}"/>
               </a:ext>
             </a:extLst>
           </p:cNvPr>
@@ -13935,7 +13943,7 @@
           <p:cNvPr id="20" name="">
             <a:extLst xmlns:a="http://schemas.openxmlformats.org/drawingml/2006/main">
               <a:ext uri="{FF2B5EF4-FFF2-40B4-BE49-F238E27FC236}">
-                <a16:creationId xmlns:a16="http://schemas.microsoft.com/office/drawing/2014/main" id="{6AC7867D-292F-4F0B-9520-CFC0E110402D}"/>
+                <a16:creationId xmlns:a16="http://schemas.microsoft.com/office/drawing/2014/main" id="{BE97CF75-2DFD-4EBE-B5B3-ACA12C8A0FE5}"/>
               </a:ext>
             </a:extLst>
           </p:cNvPr>
@@ -13992,7 +14000,7 @@
           <p:cNvPr id="21" name="">
             <a:extLst xmlns:a="http://schemas.openxmlformats.org/drawingml/2006/main">
               <a:ext uri="{FF2B5EF4-FFF2-40B4-BE49-F238E27FC236}">
-                <a16:creationId xmlns:a16="http://schemas.microsoft.com/office/drawing/2014/main" id="{75B6810E-5F01-437B-A80D-5D4285A427BB}"/>
+                <a16:creationId xmlns:a16="http://schemas.microsoft.com/office/drawing/2014/main" id="{CA309FC2-41EA-43F1-BF9F-ACD2A64BAB37}"/>
               </a:ext>
             </a:extLst>
           </p:cNvPr>
@@ -14047,7 +14055,7 @@
     </p:spTree>
     <p:extLst>
       <p:ext uri="{BB962C8B-B14F-4D97-AF65-F5344CB8AC3E}">
-        <p14:creationId xmlns:p14="http://schemas.microsoft.com/office/powerpoint/2010/main" val="8031261"/>
+        <p14:creationId xmlns:p14="http://schemas.microsoft.com/office/powerpoint/2010/main" val="993769199"/>
       </p:ext>
     </p:extLst>
   </p:cSld>
